--- a/03-build/pptx/C4_U2_docente.pptx
+++ b/03-build/pptx/C4_U2_docente.pptx
@@ -21727,34 +21727,34 @@
         <a:sysClr val="window" lastClr="FFFFFF"/>
       </a:lt1>
       <a:dk2>
-        <a:srgbClr val="1F497D"/>
+        <a:srgbClr val="20242E"/>
       </a:dk2>
       <a:lt2>
-        <a:srgbClr val="EEECE1"/>
+        <a:srgbClr val="F3EEE4"/>
       </a:lt2>
       <a:accent1>
-        <a:srgbClr val="4F81BD"/>
+        <a:srgbClr val="D64550"/>
       </a:accent1>
       <a:accent2>
-        <a:srgbClr val="C0504D"/>
+        <a:srgbClr val="A8323B"/>
       </a:accent2>
       <a:accent3>
-        <a:srgbClr val="9BBB59"/>
+        <a:srgbClr val="C25A63"/>
       </a:accent3>
       <a:accent4>
-        <a:srgbClr val="8064A2"/>
+        <a:srgbClr val="E08A90"/>
       </a:accent4>
       <a:accent5>
-        <a:srgbClr val="4BACC6"/>
+        <a:srgbClr val="9D2A33"/>
       </a:accent5>
       <a:accent6>
-        <a:srgbClr val="F79646"/>
+        <a:srgbClr val="FBEAEC"/>
       </a:accent6>
       <a:hlink>
-        <a:srgbClr val="0000FF"/>
+        <a:srgbClr val="A8323B"/>
       </a:hlink>
       <a:folHlink>
-        <a:srgbClr val="800080"/>
+        <a:srgbClr val="D64550"/>
       </a:folHlink>
     </a:clrScheme>
     <a:fontScheme name="Office">
@@ -22047,34 +22047,34 @@
         <a:sysClr val="window" lastClr="FFFFFF"/>
       </a:lt1>
       <a:dk2>
-        <a:srgbClr val="1F497D"/>
+        <a:srgbClr val="20242E"/>
       </a:dk2>
       <a:lt2>
-        <a:srgbClr val="EEECE1"/>
+        <a:srgbClr val="F3EEE4"/>
       </a:lt2>
       <a:accent1>
-        <a:srgbClr val="4F81BD"/>
+        <a:srgbClr val="D64550"/>
       </a:accent1>
       <a:accent2>
-        <a:srgbClr val="C0504D"/>
+        <a:srgbClr val="A8323B"/>
       </a:accent2>
       <a:accent3>
-        <a:srgbClr val="9BBB59"/>
+        <a:srgbClr val="C25A63"/>
       </a:accent3>
       <a:accent4>
-        <a:srgbClr val="8064A2"/>
+        <a:srgbClr val="E08A90"/>
       </a:accent4>
       <a:accent5>
-        <a:srgbClr val="4BACC6"/>
+        <a:srgbClr val="9D2A33"/>
       </a:accent5>
       <a:accent6>
-        <a:srgbClr val="F79646"/>
+        <a:srgbClr val="FBEAEC"/>
       </a:accent6>
       <a:hlink>
-        <a:srgbClr val="0000FF"/>
+        <a:srgbClr val="A8323B"/>
       </a:hlink>
       <a:folHlink>
-        <a:srgbClr val="800080"/>
+        <a:srgbClr val="D64550"/>
       </a:folHlink>
     </a:clrScheme>
     <a:fontScheme name="Office">

--- a/03-build/pptx/C4_U2_docente.pptx
+++ b/03-build/pptx/C4_U2_docente.pptx
@@ -12650,7 +12650,7 @@
         <p:spPr>
           <a:xfrm>
             <a:off x="7498079" y="1417320"/>
-            <a:ext cx="4206240" cy="3108960"/>
+            <a:ext cx="4206240" cy="2240280"/>
           </a:xfrm>
           <a:prstGeom prst="roundRect">
             <a:avLst>
@@ -12704,8 +12704,8 @@
         </p:nvSpPr>
         <p:spPr>
           <a:xfrm>
-            <a:off x="7726679" y="1600200"/>
-            <a:ext cx="3749039" cy="2834640"/>
+            <a:off x="7726679" y="1572768"/>
+            <a:ext cx="3749039" cy="2011680"/>
           </a:xfrm>
           <a:prstGeom prst="rect">
             <a:avLst/>
@@ -12730,7 +12730,7 @@
               </a:spcAft>
             </a:pPr>
             <a:r>
-              <a:rPr sz="1400" b="1" i="0">
+              <a:rPr sz="1300" b="1" i="0">
                 <a:solidFill>
                   <a:srgbClr val="A8323B"/>
                 </a:solidFill>
@@ -12752,7 +12752,7 @@
               </a:spcAft>
             </a:pPr>
             <a:r>
-              <a:rPr sz="1300" b="0" i="0">
+              <a:rPr sz="1150" b="0" i="0">
                 <a:solidFill>
                   <a:srgbClr val="20242E"/>
                 </a:solidFill>
@@ -12774,7 +12774,7 @@
               </a:spcAft>
             </a:pPr>
             <a:r>
-              <a:rPr sz="1300" b="0" i="0">
+              <a:rPr sz="1150" b="0" i="0">
                 <a:solidFill>
                   <a:srgbClr val="20242E"/>
                 </a:solidFill>
@@ -12796,7 +12796,7 @@
               </a:spcAft>
             </a:pPr>
             <a:r>
-              <a:rPr sz="1300" b="0" i="0">
+              <a:rPr sz="1150" b="0" i="0">
                 <a:solidFill>
                   <a:srgbClr val="20242E"/>
                 </a:solidFill>
@@ -12818,34 +12818,12 @@
               </a:spcAft>
             </a:pPr>
             <a:r>
-              <a:rPr sz="1300" b="0" i="0">
+              <a:rPr sz="1150" b="0" i="0">
                 <a:solidFill>
                   <a:srgbClr val="20242E"/>
                 </a:solidFill>
                 <a:latin typeface="Inter"/>
               </a:rPr>
-              <a:t>enfermo-a · nervioso-a · regular</a:t>
-            </a:r>
-          </a:p>
-          <a:p>
-            <a:pPr algn="l">
-              <a:lnSpc>
-                <a:spcPct val="106000"/>
-              </a:lnSpc>
-              <a:spcBef>
-                <a:spcPts val="0"/>
-              </a:spcBef>
-              <a:spcAft>
-                <a:spcPts val="200"/>
-              </a:spcAft>
-            </a:pPr>
-            <a:r>
-              <a:rPr sz="1300" b="0" i="0">
-                <a:solidFill>
-                  <a:srgbClr val="20242E"/>
-                </a:solidFill>
-                <a:latin typeface="Inter"/>
-              </a:rPr>
               <a:t>Hasta luego · Adiós · Hasta mañana</a:t>
             </a:r>
           </a:p>
@@ -12853,69 +12831,14 @@
       </p:sp>
       <p:sp>
         <p:nvSpPr>
-          <p:cNvPr id="28" name="Rounded Rectangle 27"/>
-          <p:cNvSpPr/>
-          <p:nvPr/>
-        </p:nvSpPr>
-        <p:spPr>
-          <a:xfrm>
-            <a:off x="7498079" y="4663440"/>
-            <a:ext cx="4206240" cy="1234440"/>
-          </a:xfrm>
-          <a:prstGeom prst="roundRect">
-            <a:avLst>
-              <a:gd name="adj" fmla="val 5500"/>
-            </a:avLst>
-          </a:prstGeom>
-          <a:solidFill>
-            <a:srgbClr val="FFFFFF"/>
-          </a:solidFill>
-          <a:ln w="15240">
-            <a:solidFill>
-              <a:srgbClr val="E4E3DE"/>
-            </a:solidFill>
-          </a:ln>
-          <a:effectLst/>
-          <a:effectLst>
-            <a:outerShdw blurRad="90000" dist="38000" dir="5400000" rotWithShape="0">
-              <a:srgbClr val="20242E">
-                <a:alpha val="22000"/>
-              </a:srgbClr>
-            </a:outerShdw>
-          </a:effectLst>
-        </p:spPr>
-        <p:style>
-          <a:lnRef idx="1">
-            <a:schemeClr val="accent1"/>
-          </a:lnRef>
-          <a:fillRef idx="3">
-            <a:schemeClr val="accent1"/>
-          </a:fillRef>
-          <a:effectRef idx="2">
-            <a:schemeClr val="accent1"/>
-          </a:effectRef>
-          <a:fontRef idx="minor">
-            <a:schemeClr val="lt1"/>
-          </a:fontRef>
-        </p:style>
-        <p:txBody>
-          <a:bodyPr rtlCol="0" anchor="ctr"/>
-          <a:lstStyle/>
-          <a:p>
-            <a:pPr algn="ctr"/>
-          </a:p>
-        </p:txBody>
-      </p:sp>
-      <p:sp>
-        <p:nvSpPr>
-          <p:cNvPr id="29" name="TextBox 28"/>
+          <p:cNvPr id="28" name="TextBox 27"/>
           <p:cNvSpPr txBox="1"/>
           <p:nvPr/>
         </p:nvSpPr>
         <p:spPr>
           <a:xfrm>
-            <a:off x="7726679" y="4800600"/>
-            <a:ext cx="3749039" cy="1005840"/>
+            <a:off x="7498079" y="3767328"/>
+            <a:ext cx="4206240" cy="274320"/>
           </a:xfrm>
           <a:prstGeom prst="rect">
             <a:avLst/>
@@ -12940,39 +12863,50 @@
               </a:spcAft>
             </a:pPr>
             <a:r>
-              <a:rPr sz="1200" b="1" i="0">
+              <a:rPr sz="1100" b="1" i="0">
                 <a:solidFill>
                   <a:srgbClr val="A8323B"/>
                 </a:solidFill>
                 <a:latin typeface="Bricolage Grotesque"/>
               </a:rPr>
-              <a:t>🎬 Vídeo online</a:t>
-            </a:r>
-          </a:p>
-          <a:p>
-            <a:pPr algn="l">
-              <a:lnSpc>
-                <a:spcPct val="106000"/>
-              </a:lnSpc>
-              <a:spcBef>
-                <a:spcPts val="0"/>
-              </a:spcBef>
-              <a:spcAft>
-                <a:spcPts val="200"/>
-              </a:spcAft>
-            </a:pPr>
-            <a:r>
-              <a:rPr sz="1100" b="0" i="0">
-                <a:solidFill>
-                  <a:srgbClr val="6A6E78"/>
-                </a:solidFill>
-                <a:latin typeface="Inter"/>
-              </a:rPr>
-              <a:t>Scan de QR op de cursus of open de digitale hub → tabblad Escucha.</a:t>
-            </a:r>
-          </a:p>
-        </p:txBody>
-      </p:sp>
+              <a:t>🎬 Sitcom · Episodio 2 — klik om af te spelen</a:t>
+            </a:r>
+          </a:p>
+        </p:txBody>
+      </p:sp>
+      <p:pic>
+        <p:nvPicPr>
+          <p:cNvPr id="29" name="Picture 28" descr="video_poster_U2.png">
+            <a:hlinkClick r:id="" action="ppaction://media"/>
+          </p:cNvPr>
+          <p:cNvPicPr>
+            <a:picLocks noChangeAspect="1"/>
+          </p:cNvPicPr>
+          <p:nvPr>
+            <a:videoFile r:link="rId3"/>
+            <p:extLst>
+              <p:ext uri="{DAA4B4D4-6D71-4841-9C94-3DE7FCFB9230}">
+                <p14:media xmlns:p14="http://schemas.microsoft.com/office/powerpoint/2010/main" r:embed="rId4"/>
+              </p:ext>
+            </p:extLst>
+          </p:nvPr>
+        </p:nvPicPr>
+        <p:blipFill>
+          <a:blip r:embed="rId2"/>
+          <a:stretch>
+            <a:fillRect/>
+          </a:stretch>
+        </p:blipFill>
+        <p:spPr>
+          <a:xfrm>
+            <a:off x="7498079" y="4069080"/>
+            <a:ext cx="4206240" cy="2331720"/>
+          </a:xfrm>
+          <a:prstGeom prst="rect">
+            <a:avLst/>
+          </a:prstGeom>
+        </p:spPr>
+      </p:pic>
       <p:sp>
         <p:nvSpPr>
           <p:cNvPr id="30" name="Rectangle 29"/>

--- a/03-build/pptx/C4_U2_docente.pptx
+++ b/03-build/pptx/C4_U2_docente.pptx
@@ -19,6 +19,7 @@
     <p:sldId id="267" r:id="rId19"/>
     <p:sldId id="268" r:id="rId20"/>
     <p:sldId id="269" r:id="rId21"/>
+    <p:sldId id="270" r:id="rId22"/>
   </p:sldIdLst>
   <p:sldSz cx="12191695" cy="6858000" type="screen4x3"/>
   <p:notesSz cx="6858000" cy="9144000"/>
@@ -7889,7 +7890,7 @@
         <p:spPr>
           <a:xfrm>
             <a:off x="502920" y="182880"/>
-            <a:ext cx="623620" cy="292608"/>
+            <a:ext cx="875995" cy="292608"/>
           </a:xfrm>
           <a:prstGeom prst="roundRect">
             <a:avLst>
@@ -7930,7 +7931,7 @@
                 </a:solidFill>
                 <a:latin typeface="Inter"/>
               </a:rPr>
-              <a:t>REPASO</a:t>
+              <a:t>FUNCIONES</a:t>
             </a:r>
           </a:p>
         </p:txBody>
@@ -7975,7 +7976,7 @@
                 </a:solidFill>
                 <a:latin typeface="Bricolage Grotesque"/>
               </a:rPr>
-              <a:t>Lo esencial de un vistazo</a:t>
+              <a:t>Mis funciones comunicativas</a:t>
             </a:r>
           </a:p>
         </p:txBody>
@@ -8020,21 +8021,229 @@
                 </a:solidFill>
                 <a:latin typeface="Inter"/>
               </a:rPr>
-              <a:t>Wat je nu kunt — semáforo</a:t>
-            </a:r>
-          </a:p>
-        </p:txBody>
-      </p:sp>
-      <p:sp>
-        <p:nvSpPr>
-          <p:cNvPr id="8" name="Rounded Rectangle 7"/>
+              <a:t>Lo que ya sé hacer — crece cada unidad</a:t>
+            </a:r>
+          </a:p>
+        </p:txBody>
+      </p:sp>
+      <p:sp>
+        <p:nvSpPr>
+          <p:cNvPr id="8" name="TextBox 7"/>
+          <p:cNvSpPr txBox="1"/>
+          <p:nvPr/>
+        </p:nvSpPr>
+        <p:spPr>
+          <a:xfrm>
+            <a:off x="548640" y="1298448"/>
+            <a:ext cx="11155680" cy="320040"/>
+          </a:xfrm>
+          <a:prstGeom prst="rect">
+            <a:avLst/>
+          </a:prstGeom>
+          <a:noFill/>
+        </p:spPr>
+        <p:txBody>
+          <a:bodyPr wrap="square" anchor="t" lIns="38100" rIns="38100" tIns="25400" bIns="25400">
+            <a:spAutoFit/>
+          </a:bodyPr>
+          <a:lstStyle/>
+          <a:p>
+            <a:pPr algn="l">
+              <a:lnSpc>
+                <a:spcPct val="106000"/>
+              </a:lnSpc>
+              <a:spcBef>
+                <a:spcPts val="0"/>
+              </a:spcBef>
+              <a:spcAft>
+                <a:spcPts val="200"/>
+              </a:spcAft>
+            </a:pPr>
+            <a:r>
+              <a:rPr sz="1300" b="1" i="0">
+                <a:solidFill>
+                  <a:srgbClr val="A8323B"/>
+                </a:solidFill>
+                <a:latin typeface="Bricolage Grotesque"/>
+              </a:rPr>
+              <a:t>Mi repertorio: 6 / 8 funciones — </a:t>
+            </a:r>
+            <a:r>
+              <a:rPr sz="1200" b="0" i="0">
+                <a:solidFill>
+                  <a:srgbClr val="6A6E78"/>
+                </a:solidFill>
+                <a:latin typeface="Inter"/>
+              </a:rPr>
+              <a:t>no solo palabras: lo que puedo HACER con el español.</a:t>
+            </a:r>
+          </a:p>
+        </p:txBody>
+      </p:sp>
+      <p:sp>
+        <p:nvSpPr>
+          <p:cNvPr id="9" name="Rounded Rectangle 8"/>
           <p:cNvSpPr/>
           <p:nvPr/>
         </p:nvSpPr>
         <p:spPr>
           <a:xfrm>
-            <a:off x="502920" y="1554480"/>
-            <a:ext cx="6949440" cy="4023360"/>
+            <a:off x="502920" y="1691640"/>
+            <a:ext cx="5394960" cy="1060704"/>
+          </a:xfrm>
+          <a:prstGeom prst="roundRect">
+            <a:avLst>
+              <a:gd name="adj" fmla="val 5500"/>
+            </a:avLst>
+          </a:prstGeom>
+          <a:solidFill>
+            <a:srgbClr val="FBEAEC"/>
+          </a:solidFill>
+          <a:ln w="15240">
+            <a:solidFill>
+              <a:srgbClr val="D64550"/>
+            </a:solidFill>
+          </a:ln>
+          <a:effectLst/>
+          <a:effectLst>
+            <a:outerShdw blurRad="90000" dist="38000" dir="5400000" rotWithShape="0">
+              <a:srgbClr val="20242E">
+                <a:alpha val="22000"/>
+              </a:srgbClr>
+            </a:outerShdw>
+          </a:effectLst>
+        </p:spPr>
+        <p:style>
+          <a:lnRef idx="1">
+            <a:schemeClr val="accent1"/>
+          </a:lnRef>
+          <a:fillRef idx="3">
+            <a:schemeClr val="accent1"/>
+          </a:fillRef>
+          <a:effectRef idx="2">
+            <a:schemeClr val="accent1"/>
+          </a:effectRef>
+          <a:fontRef idx="minor">
+            <a:schemeClr val="lt1"/>
+          </a:fontRef>
+        </p:style>
+        <p:txBody>
+          <a:bodyPr rtlCol="0" anchor="ctr"/>
+          <a:lstStyle/>
+          <a:p>
+            <a:pPr algn="ctr"/>
+          </a:p>
+        </p:txBody>
+      </p:sp>
+      <p:sp>
+        <p:nvSpPr>
+          <p:cNvPr id="10" name="TextBox 9"/>
+          <p:cNvSpPr txBox="1"/>
+          <p:nvPr/>
+        </p:nvSpPr>
+        <p:spPr>
+          <a:xfrm>
+            <a:off x="704088" y="1801368"/>
+            <a:ext cx="4992624" cy="365760"/>
+          </a:xfrm>
+          <a:prstGeom prst="rect">
+            <a:avLst/>
+          </a:prstGeom>
+          <a:noFill/>
+        </p:spPr>
+        <p:txBody>
+          <a:bodyPr wrap="square" anchor="t" lIns="38100" rIns="38100" tIns="25400" bIns="25400">
+            <a:spAutoFit/>
+          </a:bodyPr>
+          <a:lstStyle/>
+          <a:p>
+            <a:pPr algn="l">
+              <a:lnSpc>
+                <a:spcPct val="106000"/>
+              </a:lnSpc>
+              <a:spcBef>
+                <a:spcPts val="0"/>
+              </a:spcBef>
+              <a:spcAft>
+                <a:spcPts val="200"/>
+              </a:spcAft>
+            </a:pPr>
+            <a:r>
+              <a:rPr sz="1250" b="1" i="0">
+                <a:solidFill>
+                  <a:srgbClr val="20242E"/>
+                </a:solidFill>
+                <a:latin typeface="Bricolage Grotesque"/>
+              </a:rPr>
+              <a:t>Saludar y despedirse</a:t>
+            </a:r>
+            <a:r>
+              <a:rPr sz="900" b="1" i="0">
+                <a:solidFill>
+                  <a:srgbClr val="A8323B"/>
+                </a:solidFill>
+                <a:latin typeface="Inter"/>
+              </a:rPr>
+              <a:t>  ▲ nivel+</a:t>
+            </a:r>
+          </a:p>
+        </p:txBody>
+      </p:sp>
+      <p:sp>
+        <p:nvSpPr>
+          <p:cNvPr id="11" name="TextBox 10"/>
+          <p:cNvSpPr txBox="1"/>
+          <p:nvPr/>
+        </p:nvSpPr>
+        <p:spPr>
+          <a:xfrm>
+            <a:off x="704088" y="2194560"/>
+            <a:ext cx="4992624" cy="502920"/>
+          </a:xfrm>
+          <a:prstGeom prst="rect">
+            <a:avLst/>
+          </a:prstGeom>
+          <a:noFill/>
+        </p:spPr>
+        <p:txBody>
+          <a:bodyPr wrap="square" anchor="t" lIns="38100" rIns="38100" tIns="25400" bIns="25400">
+            <a:spAutoFit/>
+          </a:bodyPr>
+          <a:lstStyle/>
+          <a:p>
+            <a:pPr algn="l">
+              <a:lnSpc>
+                <a:spcPct val="106000"/>
+              </a:lnSpc>
+              <a:spcBef>
+                <a:spcPts val="0"/>
+              </a:spcBef>
+              <a:spcAft>
+                <a:spcPts val="200"/>
+              </a:spcAft>
+            </a:pPr>
+            <a:r>
+              <a:rPr sz="900" b="0" i="0">
+                <a:solidFill>
+                  <a:srgbClr val="6A6E78"/>
+                </a:solidFill>
+                <a:latin typeface="Inter"/>
+              </a:rPr>
+              <a:t>Hola · Adiós · Hasta luego · Buenos días / tardes / noches · ¡Buenas! · Hasta mañana · ¡Nos vemos!</a:t>
+            </a:r>
+          </a:p>
+        </p:txBody>
+      </p:sp>
+      <p:sp>
+        <p:nvSpPr>
+          <p:cNvPr id="12" name="Rounded Rectangle 11"/>
+          <p:cNvSpPr/>
+          <p:nvPr/>
+        </p:nvSpPr>
+        <p:spPr>
+          <a:xfrm>
+            <a:off x="6263640" y="1691640"/>
+            <a:ext cx="5394960" cy="1060704"/>
           </a:xfrm>
           <a:prstGeom prst="roundRect">
             <a:avLst>
@@ -8082,14 +8291,14 @@
       </p:sp>
       <p:sp>
         <p:nvSpPr>
-          <p:cNvPr id="9" name="TextBox 8"/>
+          <p:cNvPr id="13" name="TextBox 12"/>
           <p:cNvSpPr txBox="1"/>
           <p:nvPr/>
         </p:nvSpPr>
         <p:spPr>
           <a:xfrm>
-            <a:off x="777240" y="1737360"/>
-            <a:ext cx="6492240" cy="3657600"/>
+            <a:off x="6464808" y="1801368"/>
+            <a:ext cx="4992624" cy="365760"/>
           </a:xfrm>
           <a:prstGeom prst="rect">
             <a:avLst/>
@@ -8114,15 +8323,201 @@
               </a:spcAft>
             </a:pPr>
             <a:r>
-              <a:rPr sz="1400" b="1" i="0">
+              <a:rPr sz="1250" b="1" i="0">
+                <a:solidFill>
+                  <a:srgbClr val="20242E"/>
+                </a:solidFill>
+                <a:latin typeface="Bricolage Grotesque"/>
+              </a:rPr>
+              <a:t>Presentarse (decir quién soy)</a:t>
+            </a:r>
+            <a:r>
+              <a:rPr sz="900" b="1" i="0">
                 <a:solidFill>
                   <a:srgbClr val="A8323B"/>
                 </a:solidFill>
+                <a:latin typeface="Inter"/>
+              </a:rPr>
+              <a:t/>
+            </a:r>
+          </a:p>
+        </p:txBody>
+      </p:sp>
+      <p:sp>
+        <p:nvSpPr>
+          <p:cNvPr id="14" name="TextBox 13"/>
+          <p:cNvSpPr txBox="1"/>
+          <p:nvPr/>
+        </p:nvSpPr>
+        <p:spPr>
+          <a:xfrm>
+            <a:off x="6464808" y="2194560"/>
+            <a:ext cx="4992624" cy="502920"/>
+          </a:xfrm>
+          <a:prstGeom prst="rect">
+            <a:avLst/>
+          </a:prstGeom>
+          <a:noFill/>
+        </p:spPr>
+        <p:txBody>
+          <a:bodyPr wrap="square" anchor="t" lIns="38100" rIns="38100" tIns="25400" bIns="25400">
+            <a:spAutoFit/>
+          </a:bodyPr>
+          <a:lstStyle/>
+          <a:p>
+            <a:pPr algn="l">
+              <a:lnSpc>
+                <a:spcPct val="106000"/>
+              </a:lnSpc>
+              <a:spcBef>
+                <a:spcPts val="0"/>
+              </a:spcBef>
+              <a:spcAft>
+                <a:spcPts val="200"/>
+              </a:spcAft>
+            </a:pPr>
+            <a:r>
+              <a:rPr sz="900" b="0" i="0">
+                <a:solidFill>
+                  <a:srgbClr val="6A6E78"/>
+                </a:solidFill>
+                <a:latin typeface="Inter"/>
+              </a:rPr>
+              <a:t>Me llamo… · (Yo) soy… · Encantado/a</a:t>
+            </a:r>
+          </a:p>
+        </p:txBody>
+      </p:sp>
+      <p:sp>
+        <p:nvSpPr>
+          <p:cNvPr id="15" name="Rounded Rectangle 14"/>
+          <p:cNvSpPr/>
+          <p:nvPr/>
+        </p:nvSpPr>
+        <p:spPr>
+          <a:xfrm>
+            <a:off x="502920" y="2898648"/>
+            <a:ext cx="5394960" cy="1060704"/>
+          </a:xfrm>
+          <a:prstGeom prst="roundRect">
+            <a:avLst>
+              <a:gd name="adj" fmla="val 5500"/>
+            </a:avLst>
+          </a:prstGeom>
+          <a:solidFill>
+            <a:srgbClr val="FFFFFF"/>
+          </a:solidFill>
+          <a:ln w="15240">
+            <a:solidFill>
+              <a:srgbClr val="E4E3DE"/>
+            </a:solidFill>
+          </a:ln>
+          <a:effectLst/>
+          <a:effectLst>
+            <a:outerShdw blurRad="90000" dist="38000" dir="5400000" rotWithShape="0">
+              <a:srgbClr val="20242E">
+                <a:alpha val="22000"/>
+              </a:srgbClr>
+            </a:outerShdw>
+          </a:effectLst>
+        </p:spPr>
+        <p:style>
+          <a:lnRef idx="1">
+            <a:schemeClr val="accent1"/>
+          </a:lnRef>
+          <a:fillRef idx="3">
+            <a:schemeClr val="accent1"/>
+          </a:fillRef>
+          <a:effectRef idx="2">
+            <a:schemeClr val="accent1"/>
+          </a:effectRef>
+          <a:fontRef idx="minor">
+            <a:schemeClr val="lt1"/>
+          </a:fontRef>
+        </p:style>
+        <p:txBody>
+          <a:bodyPr rtlCol="0" anchor="ctr"/>
+          <a:lstStyle/>
+          <a:p>
+            <a:pPr algn="ctr"/>
+          </a:p>
+        </p:txBody>
+      </p:sp>
+      <p:sp>
+        <p:nvSpPr>
+          <p:cNvPr id="16" name="TextBox 15"/>
+          <p:cNvSpPr txBox="1"/>
+          <p:nvPr/>
+        </p:nvSpPr>
+        <p:spPr>
+          <a:xfrm>
+            <a:off x="704088" y="3008376"/>
+            <a:ext cx="4992624" cy="365760"/>
+          </a:xfrm>
+          <a:prstGeom prst="rect">
+            <a:avLst/>
+          </a:prstGeom>
+          <a:noFill/>
+        </p:spPr>
+        <p:txBody>
+          <a:bodyPr wrap="square" anchor="t" lIns="38100" rIns="38100" tIns="25400" bIns="25400">
+            <a:spAutoFit/>
+          </a:bodyPr>
+          <a:lstStyle/>
+          <a:p>
+            <a:pPr algn="l">
+              <a:lnSpc>
+                <a:spcPct val="106000"/>
+              </a:lnSpc>
+              <a:spcBef>
+                <a:spcPts val="0"/>
+              </a:spcBef>
+              <a:spcAft>
+                <a:spcPts val="200"/>
+              </a:spcAft>
+            </a:pPr>
+            <a:r>
+              <a:rPr sz="1250" b="1" i="0">
+                <a:solidFill>
+                  <a:srgbClr val="20242E"/>
+                </a:solidFill>
                 <a:latin typeface="Bricolage Grotesque"/>
               </a:rPr>
-              <a:t>Zo groet je volgens het uur</a:t>
-            </a:r>
-          </a:p>
+              <a:t>Pedir y dar información personal</a:t>
+            </a:r>
+            <a:r>
+              <a:rPr sz="900" b="1" i="0">
+                <a:solidFill>
+                  <a:srgbClr val="A8323B"/>
+                </a:solidFill>
+                <a:latin typeface="Inter"/>
+              </a:rPr>
+              <a:t/>
+            </a:r>
+          </a:p>
+        </p:txBody>
+      </p:sp>
+      <p:sp>
+        <p:nvSpPr>
+          <p:cNvPr id="17" name="TextBox 16"/>
+          <p:cNvSpPr txBox="1"/>
+          <p:nvPr/>
+        </p:nvSpPr>
+        <p:spPr>
+          <a:xfrm>
+            <a:off x="704088" y="3401568"/>
+            <a:ext cx="4992624" cy="502920"/>
+          </a:xfrm>
+          <a:prstGeom prst="rect">
+            <a:avLst/>
+          </a:prstGeom>
+          <a:noFill/>
+        </p:spPr>
+        <p:txBody>
+          <a:bodyPr wrap="square" anchor="t" lIns="38100" rIns="38100" tIns="25400" bIns="25400">
+            <a:spAutoFit/>
+          </a:bodyPr>
+          <a:lstStyle/>
           <a:p>
             <a:pPr algn="l">
               <a:lnSpc>
@@ -8136,159 +8531,27 @@
               </a:spcAft>
             </a:pPr>
             <a:r>
-              <a:rPr sz="1400" b="0" i="0">
-                <a:solidFill>
-                  <a:srgbClr val="20242E"/>
-                </a:solidFill>
-                <a:latin typeface="Inter"/>
-              </a:rPr>
-              <a:t>🌅 Buenos días · ☀️ Buenas tardes · 🌙 Buenas noches</a:t>
-            </a:r>
-          </a:p>
-          <a:p>
-            <a:pPr algn="l">
-              <a:lnSpc>
-                <a:spcPct val="106000"/>
-              </a:lnSpc>
-              <a:spcBef>
-                <a:spcPts val="0"/>
-              </a:spcBef>
-              <a:spcAft>
-                <a:spcPts val="200"/>
-              </a:spcAft>
-            </a:pPr>
-            <a:r>
-              <a:rPr sz="1400" b="0" i="0">
-                <a:solidFill>
-                  <a:srgbClr val="20242E"/>
-                </a:solidFill>
-                <a:latin typeface="Inter"/>
-              </a:rPr>
-              <a:t>Afscheid: Adiós · Hasta luego · Hasta mañana</a:t>
-            </a:r>
-          </a:p>
-          <a:p>
-            <a:pPr algn="l">
-              <a:lnSpc>
-                <a:spcPct val="106000"/>
-              </a:lnSpc>
-              <a:spcBef>
-                <a:spcPts val="0"/>
-              </a:spcBef>
-              <a:spcAft>
-                <a:spcPts val="200"/>
-              </a:spcAft>
-            </a:pPr>
-            <a:r>
-              <a:rPr sz="600" b="0" i="0">
-                <a:solidFill>
-                  <a:srgbClr val="20242E"/>
-                </a:solidFill>
-                <a:latin typeface="Inter"/>
-              </a:rPr>
-              <a:t/>
-            </a:r>
-          </a:p>
-          <a:p>
-            <a:pPr algn="l">
-              <a:lnSpc>
-                <a:spcPct val="106000"/>
-              </a:lnSpc>
-              <a:spcBef>
-                <a:spcPts val="0"/>
-              </a:spcBef>
-              <a:spcAft>
-                <a:spcPts val="200"/>
-              </a:spcAft>
-            </a:pPr>
-            <a:r>
-              <a:rPr sz="1400" b="1" i="0">
-                <a:solidFill>
-                  <a:srgbClr val="A8323B"/>
-                </a:solidFill>
-                <a:latin typeface="Bricolage Grotesque"/>
-              </a:rPr>
-              <a:t>Zo zeg je hoe het gaat</a:t>
-            </a:r>
-          </a:p>
-          <a:p>
-            <a:pPr algn="l">
-              <a:lnSpc>
-                <a:spcPct val="106000"/>
-              </a:lnSpc>
-              <a:spcBef>
-                <a:spcPts val="0"/>
-              </a:spcBef>
-              <a:spcAft>
-                <a:spcPts val="200"/>
-              </a:spcAft>
-            </a:pPr>
-            <a:r>
-              <a:rPr sz="1300" b="0" i="0">
-                <a:solidFill>
-                  <a:srgbClr val="20242E"/>
-                </a:solidFill>
-                <a:latin typeface="Inter"/>
-              </a:rPr>
-              <a:t>¿Cómo estás? → Estoy bien / cansad_ / ocupad_.</a:t>
-            </a:r>
-          </a:p>
-          <a:p>
-            <a:pPr algn="l">
-              <a:lnSpc>
-                <a:spcPct val="106000"/>
-              </a:lnSpc>
-              <a:spcBef>
-                <a:spcPts val="0"/>
-              </a:spcBef>
-              <a:spcAft>
-                <a:spcPts val="200"/>
-              </a:spcAft>
-            </a:pPr>
-            <a:r>
-              <a:rPr sz="1300" b="0" i="0">
-                <a:solidFill>
-                  <a:srgbClr val="20242E"/>
-                </a:solidFill>
-                <a:latin typeface="Inter"/>
-              </a:rPr>
-              <a:t>estar: estoy · estás · está</a:t>
-            </a:r>
-          </a:p>
-          <a:p>
-            <a:pPr algn="l">
-              <a:lnSpc>
-                <a:spcPct val="106000"/>
-              </a:lnSpc>
-              <a:spcBef>
-                <a:spcPts val="0"/>
-              </a:spcBef>
-              <a:spcAft>
-                <a:spcPts val="200"/>
-              </a:spcAft>
-            </a:pPr>
-            <a:r>
-              <a:rPr sz="1300" b="0" i="0">
-                <a:solidFill>
-                  <a:srgbClr val="20242E"/>
-                </a:solidFill>
-                <a:latin typeface="Inter"/>
-              </a:rPr>
-              <a:t>-o = ♂ · -a = ♀   |   tú = vriend · usted = beleefd</a:t>
-            </a:r>
-          </a:p>
-        </p:txBody>
-      </p:sp>
-      <p:sp>
-        <p:nvSpPr>
-          <p:cNvPr id="10" name="Rounded Rectangle 9"/>
+              <a:rPr sz="900" b="0" i="0">
+                <a:solidFill>
+                  <a:srgbClr val="6A6E78"/>
+                </a:solidFill>
+                <a:latin typeface="Inter"/>
+              </a:rPr>
+              <a:t>¿Cómo te llamas? · ¿Y tú?</a:t>
+            </a:r>
+          </a:p>
+        </p:txBody>
+      </p:sp>
+      <p:sp>
+        <p:nvSpPr>
+          <p:cNvPr id="18" name="Rounded Rectangle 17"/>
           <p:cNvSpPr/>
           <p:nvPr/>
         </p:nvSpPr>
         <p:spPr>
           <a:xfrm>
-            <a:off x="7680960" y="1554480"/>
-            <a:ext cx="4023360" cy="4023360"/>
+            <a:off x="6263640" y="2898648"/>
+            <a:ext cx="5394960" cy="1060704"/>
           </a:xfrm>
           <a:prstGeom prst="roundRect">
             <a:avLst>
@@ -8336,14 +8599,14 @@
       </p:sp>
       <p:sp>
         <p:nvSpPr>
-          <p:cNvPr id="11" name="TextBox 10"/>
+          <p:cNvPr id="19" name="TextBox 18"/>
           <p:cNvSpPr txBox="1"/>
           <p:nvPr/>
         </p:nvSpPr>
         <p:spPr>
           <a:xfrm>
-            <a:off x="7909560" y="1737360"/>
-            <a:ext cx="3566160" cy="457200"/>
+            <a:off x="6464808" y="3008376"/>
+            <a:ext cx="4992624" cy="365760"/>
           </a:xfrm>
           <a:prstGeom prst="rect">
             <a:avLst/>
@@ -8368,27 +8631,36 @@
               </a:spcAft>
             </a:pPr>
             <a:r>
-              <a:rPr sz="1300" b="1" i="0">
+              <a:rPr sz="1250" b="1" i="0">
+                <a:solidFill>
+                  <a:srgbClr val="20242E"/>
+                </a:solidFill>
+                <a:latin typeface="Bricolage Grotesque"/>
+              </a:rPr>
+              <a:t>Reaccionar con cortesía</a:t>
+            </a:r>
+            <a:r>
+              <a:rPr sz="900" b="1" i="0">
                 <a:solidFill>
                   <a:srgbClr val="A8323B"/>
                 </a:solidFill>
-                <a:latin typeface="Bricolage Grotesque"/>
-              </a:rPr>
-              <a:t>Puedo… · Ik kan…</a:t>
-            </a:r>
-          </a:p>
-        </p:txBody>
-      </p:sp>
-      <p:sp>
-        <p:nvSpPr>
-          <p:cNvPr id="12" name="TextBox 11"/>
+                <a:latin typeface="Inter"/>
+              </a:rPr>
+              <a:t>  ● NUEVA</a:t>
+            </a:r>
+          </a:p>
+        </p:txBody>
+      </p:sp>
+      <p:sp>
+        <p:nvSpPr>
+          <p:cNvPr id="20" name="TextBox 19"/>
           <p:cNvSpPr txBox="1"/>
           <p:nvPr/>
         </p:nvSpPr>
         <p:spPr>
           <a:xfrm>
-            <a:off x="7909560" y="2331720"/>
-            <a:ext cx="3566160" cy="457200"/>
+            <a:off x="6464808" y="3401568"/>
+            <a:ext cx="4992624" cy="502920"/>
           </a:xfrm>
           <a:prstGeom prst="rect">
             <a:avLst/>
@@ -8413,36 +8685,82 @@
               </a:spcAft>
             </a:pPr>
             <a:r>
-              <a:rPr sz="1200" b="0" i="0">
-                <a:solidFill>
-                  <a:srgbClr val="20242E"/>
-                </a:solidFill>
-                <a:latin typeface="Inter"/>
-              </a:rPr>
-              <a:t>🟢🟡🔴  </a:t>
-            </a:r>
-            <a:r>
-              <a:rPr sz="1200" b="0" i="0">
-                <a:solidFill>
-                  <a:srgbClr val="20242E"/>
-                </a:solidFill>
-                <a:latin typeface="Inter"/>
-              </a:rPr>
-              <a:t>groeten volgens het moment</a:t>
-            </a:r>
-          </a:p>
-        </p:txBody>
-      </p:sp>
-      <p:sp>
-        <p:nvSpPr>
-          <p:cNvPr id="13" name="TextBox 12"/>
+              <a:rPr sz="900" b="0" i="0">
+                <a:solidFill>
+                  <a:srgbClr val="6A6E78"/>
+                </a:solidFill>
+                <a:latin typeface="Inter"/>
+              </a:rPr>
+              <a:t>Por favor · Gracias · Muchas gracias · De nada · Perdona</a:t>
+            </a:r>
+          </a:p>
+        </p:txBody>
+      </p:sp>
+      <p:sp>
+        <p:nvSpPr>
+          <p:cNvPr id="21" name="Rounded Rectangle 20"/>
+          <p:cNvSpPr/>
+          <p:nvPr/>
+        </p:nvSpPr>
+        <p:spPr>
+          <a:xfrm>
+            <a:off x="502920" y="4105656"/>
+            <a:ext cx="5394960" cy="1060704"/>
+          </a:xfrm>
+          <a:prstGeom prst="roundRect">
+            <a:avLst>
+              <a:gd name="adj" fmla="val 5500"/>
+            </a:avLst>
+          </a:prstGeom>
+          <a:solidFill>
+            <a:srgbClr val="FBEAEC"/>
+          </a:solidFill>
+          <a:ln w="15240">
+            <a:solidFill>
+              <a:srgbClr val="D64550"/>
+            </a:solidFill>
+          </a:ln>
+          <a:effectLst/>
+          <a:effectLst>
+            <a:outerShdw blurRad="90000" dist="38000" dir="5400000" rotWithShape="0">
+              <a:srgbClr val="20242E">
+                <a:alpha val="22000"/>
+              </a:srgbClr>
+            </a:outerShdw>
+          </a:effectLst>
+        </p:spPr>
+        <p:style>
+          <a:lnRef idx="1">
+            <a:schemeClr val="accent1"/>
+          </a:lnRef>
+          <a:fillRef idx="3">
+            <a:schemeClr val="accent1"/>
+          </a:fillRef>
+          <a:effectRef idx="2">
+            <a:schemeClr val="accent1"/>
+          </a:effectRef>
+          <a:fontRef idx="minor">
+            <a:schemeClr val="lt1"/>
+          </a:fontRef>
+        </p:style>
+        <p:txBody>
+          <a:bodyPr rtlCol="0" anchor="ctr"/>
+          <a:lstStyle/>
+          <a:p>
+            <a:pPr algn="ctr"/>
+          </a:p>
+        </p:txBody>
+      </p:sp>
+      <p:sp>
+        <p:nvSpPr>
+          <p:cNvPr id="22" name="TextBox 21"/>
           <p:cNvSpPr txBox="1"/>
           <p:nvPr/>
         </p:nvSpPr>
         <p:spPr>
           <a:xfrm>
-            <a:off x="7909560" y="2898648"/>
-            <a:ext cx="3566160" cy="457200"/>
+            <a:off x="704088" y="4215384"/>
+            <a:ext cx="4992624" cy="365760"/>
           </a:xfrm>
           <a:prstGeom prst="rect">
             <a:avLst/>
@@ -8467,36 +8785,36 @@
               </a:spcAft>
             </a:pPr>
             <a:r>
-              <a:rPr sz="1200" b="0" i="0">
+              <a:rPr sz="1250" b="1" i="0">
                 <a:solidFill>
                   <a:srgbClr val="20242E"/>
                 </a:solidFill>
-                <a:latin typeface="Inter"/>
-              </a:rPr>
-              <a:t>🟢🟡🔴  </a:t>
-            </a:r>
-            <a:r>
-              <a:rPr sz="1200" b="0" i="0">
-                <a:solidFill>
-                  <a:srgbClr val="20242E"/>
-                </a:solidFill>
-                <a:latin typeface="Inter"/>
-              </a:rPr>
-              <a:t>hoe het gaat zeggen (estar)</a:t>
-            </a:r>
-          </a:p>
-        </p:txBody>
-      </p:sp>
-      <p:sp>
-        <p:nvSpPr>
-          <p:cNvPr id="14" name="TextBox 13"/>
+                <a:latin typeface="Bricolage Grotesque"/>
+              </a:rPr>
+              <a:t>Preguntar y decir cómo estoy</a:t>
+            </a:r>
+            <a:r>
+              <a:rPr sz="900" b="1" i="0">
+                <a:solidFill>
+                  <a:srgbClr val="A8323B"/>
+                </a:solidFill>
+                <a:latin typeface="Inter"/>
+              </a:rPr>
+              <a:t>  ● NUEVA</a:t>
+            </a:r>
+          </a:p>
+        </p:txBody>
+      </p:sp>
+      <p:sp>
+        <p:nvSpPr>
+          <p:cNvPr id="23" name="TextBox 22"/>
           <p:cNvSpPr txBox="1"/>
           <p:nvPr/>
         </p:nvSpPr>
         <p:spPr>
           <a:xfrm>
-            <a:off x="7909560" y="3465576"/>
-            <a:ext cx="3566160" cy="457200"/>
+            <a:off x="704088" y="4608576"/>
+            <a:ext cx="4992624" cy="502920"/>
           </a:xfrm>
           <a:prstGeom prst="rect">
             <a:avLst/>
@@ -8521,36 +8839,82 @@
               </a:spcAft>
             </a:pPr>
             <a:r>
-              <a:rPr sz="1200" b="0" i="0">
-                <a:solidFill>
-                  <a:srgbClr val="20242E"/>
-                </a:solidFill>
-                <a:latin typeface="Inter"/>
-              </a:rPr>
-              <a:t>🟢🟡🔴  </a:t>
-            </a:r>
-            <a:r>
-              <a:rPr sz="1200" b="0" i="0">
-                <a:solidFill>
-                  <a:srgbClr val="20242E"/>
-                </a:solidFill>
-                <a:latin typeface="Inter"/>
-              </a:rPr>
-              <a:t>afscheid nemen</a:t>
-            </a:r>
-          </a:p>
-        </p:txBody>
-      </p:sp>
-      <p:sp>
-        <p:nvSpPr>
-          <p:cNvPr id="15" name="TextBox 14"/>
+              <a:rPr sz="900" b="0" i="0">
+                <a:solidFill>
+                  <a:srgbClr val="6A6E78"/>
+                </a:solidFill>
+                <a:latin typeface="Inter"/>
+              </a:rPr>
+              <a:t>¿Qué tal? · ¿Cómo estás? · Estoy bien / cansado-a / ocupado-a · Regular</a:t>
+            </a:r>
+          </a:p>
+        </p:txBody>
+      </p:sp>
+      <p:sp>
+        <p:nvSpPr>
+          <p:cNvPr id="24" name="Rounded Rectangle 23"/>
+          <p:cNvSpPr/>
+          <p:nvPr/>
+        </p:nvSpPr>
+        <p:spPr>
+          <a:xfrm>
+            <a:off x="6263640" y="4105656"/>
+            <a:ext cx="5394960" cy="1060704"/>
+          </a:xfrm>
+          <a:prstGeom prst="roundRect">
+            <a:avLst>
+              <a:gd name="adj" fmla="val 5500"/>
+            </a:avLst>
+          </a:prstGeom>
+          <a:solidFill>
+            <a:srgbClr val="FBEAEC"/>
+          </a:solidFill>
+          <a:ln w="15240">
+            <a:solidFill>
+              <a:srgbClr val="D64550"/>
+            </a:solidFill>
+          </a:ln>
+          <a:effectLst/>
+          <a:effectLst>
+            <a:outerShdw blurRad="90000" dist="38000" dir="5400000" rotWithShape="0">
+              <a:srgbClr val="20242E">
+                <a:alpha val="22000"/>
+              </a:srgbClr>
+            </a:outerShdw>
+          </a:effectLst>
+        </p:spPr>
+        <p:style>
+          <a:lnRef idx="1">
+            <a:schemeClr val="accent1"/>
+          </a:lnRef>
+          <a:fillRef idx="3">
+            <a:schemeClr val="accent1"/>
+          </a:fillRef>
+          <a:effectRef idx="2">
+            <a:schemeClr val="accent1"/>
+          </a:effectRef>
+          <a:fontRef idx="minor">
+            <a:schemeClr val="lt1"/>
+          </a:fontRef>
+        </p:style>
+        <p:txBody>
+          <a:bodyPr rtlCol="0" anchor="ctr"/>
+          <a:lstStyle/>
+          <a:p>
+            <a:pPr algn="ctr"/>
+          </a:p>
+        </p:txBody>
+      </p:sp>
+      <p:sp>
+        <p:nvSpPr>
+          <p:cNvPr id="25" name="TextBox 24"/>
           <p:cNvSpPr txBox="1"/>
           <p:nvPr/>
         </p:nvSpPr>
         <p:spPr>
           <a:xfrm>
-            <a:off x="7909560" y="4032504"/>
-            <a:ext cx="3566160" cy="457200"/>
+            <a:off x="6464808" y="4215384"/>
+            <a:ext cx="4992624" cy="365760"/>
           </a:xfrm>
           <a:prstGeom prst="rect">
             <a:avLst/>
@@ -8575,36 +8939,36 @@
               </a:spcAft>
             </a:pPr>
             <a:r>
-              <a:rPr sz="1200" b="0" i="0">
+              <a:rPr sz="1250" b="1" i="0">
                 <a:solidFill>
                   <a:srgbClr val="20242E"/>
                 </a:solidFill>
-                <a:latin typeface="Inter"/>
-              </a:rPr>
-              <a:t>🟢🟡🔴  </a:t>
-            </a:r>
-            <a:r>
-              <a:rPr sz="1200" b="0" i="0">
-                <a:solidFill>
-                  <a:srgbClr val="20242E"/>
-                </a:solidFill>
-                <a:latin typeface="Inter"/>
-              </a:rPr>
-              <a:t>-o/-a &amp; tú/usted kiezen</a:t>
-            </a:r>
-          </a:p>
-        </p:txBody>
-      </p:sp>
-      <p:sp>
-        <p:nvSpPr>
-          <p:cNvPr id="16" name="TextBox 15"/>
+                <a:latin typeface="Bricolage Grotesque"/>
+              </a:rPr>
+              <a:t>Gestionar la comprensión</a:t>
+            </a:r>
+            <a:r>
+              <a:rPr sz="900" b="1" i="0">
+                <a:solidFill>
+                  <a:srgbClr val="A8323B"/>
+                </a:solidFill>
+                <a:latin typeface="Inter"/>
+              </a:rPr>
+              <a:t>  ▲ nivel+</a:t>
+            </a:r>
+          </a:p>
+        </p:txBody>
+      </p:sp>
+      <p:sp>
+        <p:nvSpPr>
+          <p:cNvPr id="26" name="TextBox 25"/>
           <p:cNvSpPr txBox="1"/>
           <p:nvPr/>
         </p:nvSpPr>
         <p:spPr>
           <a:xfrm>
-            <a:off x="7909560" y="4892040"/>
-            <a:ext cx="3566160" cy="640080"/>
+            <a:off x="6464808" y="4608576"/>
+            <a:ext cx="4992624" cy="502920"/>
           </a:xfrm>
           <a:prstGeom prst="rect">
             <a:avLst/>
@@ -8629,42 +8993,20 @@
               </a:spcAft>
             </a:pPr>
             <a:r>
-              <a:rPr sz="1200" b="1" i="0">
-                <a:solidFill>
-                  <a:srgbClr val="A8323B"/>
-                </a:solidFill>
-                <a:latin typeface="Bricolage Grotesque"/>
-              </a:rPr>
-              <a:t>🎮 Repasa jugando</a:t>
-            </a:r>
-          </a:p>
-          <a:p>
-            <a:pPr algn="l">
-              <a:lnSpc>
-                <a:spcPct val="106000"/>
-              </a:lnSpc>
-              <a:spcBef>
-                <a:spcPts val="0"/>
-              </a:spcBef>
-              <a:spcAft>
-                <a:spcPts val="200"/>
-              </a:spcAft>
-            </a:pPr>
-            <a:r>
-              <a:rPr sz="1100" b="0" i="1">
+              <a:rPr sz="900" b="0" i="0">
                 <a:solidFill>
                   <a:srgbClr val="6A6E78"/>
                 </a:solidFill>
                 <a:latin typeface="Inter"/>
               </a:rPr>
-              <a:t>online op de hub</a:t>
-            </a:r>
-          </a:p>
-        </p:txBody>
-      </p:sp>
-      <p:sp>
-        <p:nvSpPr>
-          <p:cNvPr id="17" name="Rectangle 16"/>
+              <a:t>¿Cómo? · Otra vez, por favor · ¿Puedes repetir?</a:t>
+            </a:r>
+          </a:p>
+        </p:txBody>
+      </p:sp>
+      <p:sp>
+        <p:nvSpPr>
+          <p:cNvPr id="27" name="Rectangle 26"/>
           <p:cNvSpPr/>
           <p:nvPr/>
         </p:nvSpPr>
@@ -8708,7 +9050,7 @@
       </p:sp>
       <p:sp>
         <p:nvSpPr>
-          <p:cNvPr id="18" name="TextBox 17"/>
+          <p:cNvPr id="28" name="TextBox 27"/>
           <p:cNvSpPr txBox="1"/>
           <p:nvPr/>
         </p:nvSpPr>
@@ -8762,7 +9104,7 @@
       </p:sp>
       <p:sp>
         <p:nvSpPr>
-          <p:cNvPr id="19" name="TextBox 18"/>
+          <p:cNvPr id="29" name="TextBox 28"/>
           <p:cNvSpPr txBox="1"/>
           <p:nvPr/>
         </p:nvSpPr>
@@ -8807,7 +9149,7 @@
       </p:sp>
       <p:sp>
         <p:nvSpPr>
-          <p:cNvPr id="20" name="TextBox 19"/>
+          <p:cNvPr id="30" name="TextBox 29"/>
           <p:cNvSpPr txBox="1"/>
           <p:nvPr/>
         </p:nvSpPr>
@@ -8883,7 +9225,7 @@
             <a:avLst/>
           </a:prstGeom>
           <a:solidFill>
-            <a:srgbClr val="241C1B"/>
+            <a:srgbClr val="FCFBF8"/>
           </a:solidFill>
           <a:ln>
             <a:noFill/>
@@ -8914,14 +9256,202 @@
       </p:sp>
       <p:sp>
         <p:nvSpPr>
-          <p:cNvPr id="3" name="TextBox 2"/>
+          <p:cNvPr id="3" name="Rectangle 2"/>
+          <p:cNvSpPr/>
+          <p:nvPr/>
+        </p:nvSpPr>
+        <p:spPr>
+          <a:xfrm>
+            <a:off x="0" y="0"/>
+            <a:ext cx="12191695" cy="1078992"/>
+          </a:xfrm>
+          <a:prstGeom prst="rect">
+            <a:avLst/>
+          </a:prstGeom>
+          <a:solidFill>
+            <a:srgbClr val="D64550"/>
+          </a:solidFill>
+          <a:ln>
+            <a:noFill/>
+          </a:ln>
+          <a:effectLst/>
+        </p:spPr>
+        <p:style>
+          <a:lnRef idx="1">
+            <a:schemeClr val="accent1"/>
+          </a:lnRef>
+          <a:fillRef idx="3">
+            <a:schemeClr val="accent1"/>
+          </a:fillRef>
+          <a:effectRef idx="2">
+            <a:schemeClr val="accent1"/>
+          </a:effectRef>
+          <a:fontRef idx="minor">
+            <a:schemeClr val="lt1"/>
+          </a:fontRef>
+        </p:style>
+        <p:txBody>
+          <a:bodyPr rtlCol="0" anchor="ctr"/>
+          <a:lstStyle/>
+          <a:p>
+            <a:pPr algn="ctr"/>
+          </a:p>
+        </p:txBody>
+      </p:sp>
+      <p:sp>
+        <p:nvSpPr>
+          <p:cNvPr id="4" name="Rectangle 3"/>
+          <p:cNvSpPr/>
+          <p:nvPr/>
+        </p:nvSpPr>
+        <p:spPr>
+          <a:xfrm>
+            <a:off x="0" y="1078992"/>
+            <a:ext cx="12191695" cy="54864"/>
+          </a:xfrm>
+          <a:prstGeom prst="rect">
+            <a:avLst/>
+          </a:prstGeom>
+          <a:solidFill>
+            <a:srgbClr val="A8323B"/>
+          </a:solidFill>
+          <a:ln>
+            <a:noFill/>
+          </a:ln>
+          <a:effectLst/>
+        </p:spPr>
+        <p:style>
+          <a:lnRef idx="1">
+            <a:schemeClr val="accent1"/>
+          </a:lnRef>
+          <a:fillRef idx="3">
+            <a:schemeClr val="accent1"/>
+          </a:fillRef>
+          <a:effectRef idx="2">
+            <a:schemeClr val="accent1"/>
+          </a:effectRef>
+          <a:fontRef idx="minor">
+            <a:schemeClr val="lt1"/>
+          </a:fontRef>
+        </p:style>
+        <p:txBody>
+          <a:bodyPr rtlCol="0" anchor="ctr"/>
+          <a:lstStyle/>
+          <a:p>
+            <a:pPr algn="ctr"/>
+          </a:p>
+        </p:txBody>
+      </p:sp>
+      <p:sp>
+        <p:nvSpPr>
+          <p:cNvPr id="5" name="Rounded Rectangle 4"/>
+          <p:cNvSpPr/>
+          <p:nvPr/>
+        </p:nvSpPr>
+        <p:spPr>
+          <a:xfrm>
+            <a:off x="502920" y="182880"/>
+            <a:ext cx="623620" cy="292608"/>
+          </a:xfrm>
+          <a:prstGeom prst="roundRect">
+            <a:avLst>
+              <a:gd name="adj" fmla="val 50000"/>
+            </a:avLst>
+          </a:prstGeom>
+          <a:solidFill>
+            <a:srgbClr val="FFFFFF"/>
+          </a:solidFill>
+          <a:ln>
+            <a:noFill/>
+          </a:ln>
+          <a:effectLst/>
+        </p:spPr>
+        <p:style>
+          <a:lnRef idx="1">
+            <a:schemeClr val="accent1"/>
+          </a:lnRef>
+          <a:fillRef idx="3">
+            <a:schemeClr val="accent1"/>
+          </a:fillRef>
+          <a:effectRef idx="2">
+            <a:schemeClr val="accent1"/>
+          </a:effectRef>
+          <a:fontRef idx="minor">
+            <a:schemeClr val="lt1"/>
+          </a:fontRef>
+        </p:style>
+        <p:txBody>
+          <a:bodyPr rtlCol="0" anchor="ctr" wrap="none" lIns="88900" rIns="88900" tIns="12700" bIns="12700"/>
+          <a:lstStyle/>
+          <a:p>
+            <a:pPr algn="ctr"/>
+            <a:r>
+              <a:rPr sz="1100" b="1">
+                <a:solidFill>
+                  <a:srgbClr val="D64550"/>
+                </a:solidFill>
+                <a:latin typeface="Inter"/>
+              </a:rPr>
+              <a:t>REPASO</a:t>
+            </a:r>
+          </a:p>
+        </p:txBody>
+      </p:sp>
+      <p:sp>
+        <p:nvSpPr>
+          <p:cNvPr id="6" name="TextBox 5"/>
           <p:cNvSpPr txBox="1"/>
           <p:nvPr/>
         </p:nvSpPr>
         <p:spPr>
           <a:xfrm>
-            <a:off x="548640" y="457200"/>
-            <a:ext cx="10972800" cy="640080"/>
+            <a:off x="457200" y="457200"/>
+            <a:ext cx="9692640" cy="502920"/>
+          </a:xfrm>
+          <a:prstGeom prst="rect">
+            <a:avLst/>
+          </a:prstGeom>
+          <a:noFill/>
+        </p:spPr>
+        <p:txBody>
+          <a:bodyPr wrap="square" anchor="ctr" lIns="38100" rIns="38100" tIns="25400" bIns="25400">
+            <a:spAutoFit/>
+          </a:bodyPr>
+          <a:lstStyle/>
+          <a:p>
+            <a:pPr algn="l">
+              <a:lnSpc>
+                <a:spcPct val="106000"/>
+              </a:lnSpc>
+              <a:spcBef>
+                <a:spcPts val="0"/>
+              </a:spcBef>
+              <a:spcAft>
+                <a:spcPts val="200"/>
+              </a:spcAft>
+            </a:pPr>
+            <a:r>
+              <a:rPr sz="2700" b="1" i="0">
+                <a:solidFill>
+                  <a:srgbClr val="FFFFFF"/>
+                </a:solidFill>
+                <a:latin typeface="Bricolage Grotesque"/>
+              </a:rPr>
+              <a:t>Lo esencial de un vistazo</a:t>
+            </a:r>
+          </a:p>
+        </p:txBody>
+      </p:sp>
+      <p:sp>
+        <p:nvSpPr>
+          <p:cNvPr id="7" name="TextBox 6"/>
+          <p:cNvSpPr txBox="1"/>
+          <p:nvPr/>
+        </p:nvSpPr>
+        <p:spPr>
+          <a:xfrm>
+            <a:off x="502920" y="932688"/>
+            <a:ext cx="9692640" cy="274320"/>
           </a:xfrm>
           <a:prstGeom prst="rect">
             <a:avLst/>
@@ -8946,27 +9476,82 @@
               </a:spcAft>
             </a:pPr>
             <a:r>
-              <a:rPr sz="2200" b="1" i="0">
-                <a:solidFill>
-                  <a:srgbClr val="FFFFFF"/>
-                </a:solidFill>
-                <a:latin typeface="Bricolage Grotesque"/>
-              </a:rPr>
-              <a:t>Docentendossier · Unidad 2 «Saludos»</a:t>
-            </a:r>
-          </a:p>
-        </p:txBody>
-      </p:sp>
-      <p:sp>
-        <p:nvSpPr>
-          <p:cNvPr id="4" name="TextBox 3"/>
+              <a:rPr sz="1250" b="0" i="1">
+                <a:solidFill>
+                  <a:srgbClr val="FBEAEC"/>
+                </a:solidFill>
+                <a:latin typeface="Inter"/>
+              </a:rPr>
+              <a:t>Wat je nu kunt — semáforo</a:t>
+            </a:r>
+          </a:p>
+        </p:txBody>
+      </p:sp>
+      <p:sp>
+        <p:nvSpPr>
+          <p:cNvPr id="8" name="Rounded Rectangle 7"/>
+          <p:cNvSpPr/>
+          <p:nvPr/>
+        </p:nvSpPr>
+        <p:spPr>
+          <a:xfrm>
+            <a:off x="502920" y="1554480"/>
+            <a:ext cx="6949440" cy="4023360"/>
+          </a:xfrm>
+          <a:prstGeom prst="roundRect">
+            <a:avLst>
+              <a:gd name="adj" fmla="val 5500"/>
+            </a:avLst>
+          </a:prstGeom>
+          <a:solidFill>
+            <a:srgbClr val="FFFFFF"/>
+          </a:solidFill>
+          <a:ln w="15240">
+            <a:solidFill>
+              <a:srgbClr val="E4E3DE"/>
+            </a:solidFill>
+          </a:ln>
+          <a:effectLst/>
+          <a:effectLst>
+            <a:outerShdw blurRad="90000" dist="38000" dir="5400000" rotWithShape="0">
+              <a:srgbClr val="20242E">
+                <a:alpha val="22000"/>
+              </a:srgbClr>
+            </a:outerShdw>
+          </a:effectLst>
+        </p:spPr>
+        <p:style>
+          <a:lnRef idx="1">
+            <a:schemeClr val="accent1"/>
+          </a:lnRef>
+          <a:fillRef idx="3">
+            <a:schemeClr val="accent1"/>
+          </a:fillRef>
+          <a:effectRef idx="2">
+            <a:schemeClr val="accent1"/>
+          </a:effectRef>
+          <a:fontRef idx="minor">
+            <a:schemeClr val="lt1"/>
+          </a:fontRef>
+        </p:style>
+        <p:txBody>
+          <a:bodyPr rtlCol="0" anchor="ctr"/>
+          <a:lstStyle/>
+          <a:p>
+            <a:pPr algn="ctr"/>
+          </a:p>
+        </p:txBody>
+      </p:sp>
+      <p:sp>
+        <p:nvSpPr>
+          <p:cNvPr id="9" name="TextBox 8"/>
           <p:cNvSpPr txBox="1"/>
           <p:nvPr/>
         </p:nvSpPr>
         <p:spPr>
           <a:xfrm>
-            <a:off x="548640" y="1280160"/>
-            <a:ext cx="11064240" cy="4937760"/>
+            <a:off x="777240" y="1737360"/>
+            <a:ext cx="6492240" cy="3657600"/>
           </a:xfrm>
           <a:prstGeom prst="rect">
             <a:avLst/>
@@ -8993,11 +9578,11 @@
             <a:r>
               <a:rPr sz="1400" b="1" i="0">
                 <a:solidFill>
-                  <a:srgbClr val="FBEAEC"/>
+                  <a:srgbClr val="A8323B"/>
                 </a:solidFill>
                 <a:latin typeface="Bricolage Grotesque"/>
               </a:rPr>
-              <a:t>Timing (2 lesuren van 50 min).</a:t>
+              <a:t>Zo groet je volgens het uur</a:t>
             </a:r>
           </a:p>
           <a:p>
@@ -9013,13 +9598,13 @@
               </a:spcAft>
             </a:pPr>
             <a:r>
-              <a:rPr sz="1250" b="0" i="0">
-                <a:solidFill>
-                  <a:srgbClr val="ECEAE3"/>
-                </a:solidFill>
-                <a:latin typeface="Inter"/>
-              </a:rPr>
-              <a:t>Les 1: Escucha (sitcom ep. 2, 3 momenten) + Suena bien (jota/h muda) + Kit (saludos por el día · estar+estado). Les 2: gramática functioneel (estar · saludo por hora), hablar, tarea + música.</a:t>
+              <a:rPr sz="1400" b="0" i="0">
+                <a:solidFill>
+                  <a:srgbClr val="20242E"/>
+                </a:solidFill>
+                <a:latin typeface="Inter"/>
+              </a:rPr>
+              <a:t>🌅 Buenos días · ☀️ Buenas tardes · 🌙 Buenas noches</a:t>
             </a:r>
           </a:p>
           <a:p>
@@ -9035,6 +9620,28 @@
               </a:spcAft>
             </a:pPr>
             <a:r>
+              <a:rPr sz="1400" b="0" i="0">
+                <a:solidFill>
+                  <a:srgbClr val="20242E"/>
+                </a:solidFill>
+                <a:latin typeface="Inter"/>
+              </a:rPr>
+              <a:t>Afscheid: Adiós · Hasta luego · Hasta mañana</a:t>
+            </a:r>
+          </a:p>
+          <a:p>
+            <a:pPr algn="l">
+              <a:lnSpc>
+                <a:spcPct val="106000"/>
+              </a:lnSpc>
+              <a:spcBef>
+                <a:spcPts val="0"/>
+              </a:spcBef>
+              <a:spcAft>
+                <a:spcPts val="200"/>
+              </a:spcAft>
+            </a:pPr>
+            <a:r>
               <a:rPr sz="600" b="0" i="0">
                 <a:solidFill>
                   <a:srgbClr val="20242E"/>
@@ -9059,11 +9666,11 @@
             <a:r>
               <a:rPr sz="1400" b="1" i="0">
                 <a:solidFill>
-                  <a:srgbClr val="FBEAEC"/>
+                  <a:srgbClr val="A8323B"/>
                 </a:solidFill>
                 <a:latin typeface="Bricolage Grotesque"/>
               </a:rPr>
-              <a:t>Aanpak C4 (survival).</a:t>
+              <a:t>Zo zeg je hoe het gaat</a:t>
             </a:r>
           </a:p>
           <a:p>
@@ -9079,13 +9686,13 @@
               </a:spcAft>
             </a:pPr>
             <a:r>
-              <a:rPr sz="1250" b="0" i="0">
-                <a:solidFill>
-                  <a:srgbClr val="ECEAE3"/>
-                </a:solidFill>
-                <a:latin typeface="Inter"/>
-              </a:rPr>
-              <a:t>Chunks komen auditief binnen (luisteren → naspreken). estar enkel functioneel (estoy/estás/está voor toestand), géén ser/estar-contrast als systeem en géén volledige conjugatie — dat is C5/C6. Doelcodes: C4-GE-1/2 · C4-WS-2 · C4-MEC-3 · C4-CU-2.</a:t>
+              <a:rPr sz="1300" b="0" i="0">
+                <a:solidFill>
+                  <a:srgbClr val="20242E"/>
+                </a:solidFill>
+                <a:latin typeface="Inter"/>
+              </a:rPr>
+              <a:t>¿Cómo estás? → Estoy bien / cansad_ / ocupad_.</a:t>
             </a:r>
           </a:p>
           <a:p>
@@ -9101,13 +9708,13 @@
               </a:spcAft>
             </a:pPr>
             <a:r>
-              <a:rPr sz="600" b="0" i="0">
+              <a:rPr sz="1300" b="0" i="0">
                 <a:solidFill>
                   <a:srgbClr val="20242E"/>
                 </a:solidFill>
                 <a:latin typeface="Inter"/>
               </a:rPr>
-              <a:t/>
+              <a:t>estar: estoy · estás · está</a:t>
             </a:r>
           </a:p>
           <a:p>
@@ -9123,15 +9730,138 @@
               </a:spcAft>
             </a:pPr>
             <a:r>
-              <a:rPr sz="1400" b="1" i="0">
-                <a:solidFill>
-                  <a:srgbClr val="FBEAEC"/>
+              <a:rPr sz="1300" b="0" i="0">
+                <a:solidFill>
+                  <a:srgbClr val="20242E"/>
+                </a:solidFill>
+                <a:latin typeface="Inter"/>
+              </a:rPr>
+              <a:t>-o = ♂ · -a = ♀   |   tú = vriend · usted = beleefd</a:t>
+            </a:r>
+          </a:p>
+        </p:txBody>
+      </p:sp>
+      <p:sp>
+        <p:nvSpPr>
+          <p:cNvPr id="10" name="Rounded Rectangle 9"/>
+          <p:cNvSpPr/>
+          <p:nvPr/>
+        </p:nvSpPr>
+        <p:spPr>
+          <a:xfrm>
+            <a:off x="7680960" y="1554480"/>
+            <a:ext cx="4023360" cy="4023360"/>
+          </a:xfrm>
+          <a:prstGeom prst="roundRect">
+            <a:avLst>
+              <a:gd name="adj" fmla="val 5500"/>
+            </a:avLst>
+          </a:prstGeom>
+          <a:solidFill>
+            <a:srgbClr val="FBEAEC"/>
+          </a:solidFill>
+          <a:ln w="15240">
+            <a:solidFill>
+              <a:srgbClr val="D64550"/>
+            </a:solidFill>
+          </a:ln>
+          <a:effectLst/>
+          <a:effectLst>
+            <a:outerShdw blurRad="90000" dist="38000" dir="5400000" rotWithShape="0">
+              <a:srgbClr val="20242E">
+                <a:alpha val="22000"/>
+              </a:srgbClr>
+            </a:outerShdw>
+          </a:effectLst>
+        </p:spPr>
+        <p:style>
+          <a:lnRef idx="1">
+            <a:schemeClr val="accent1"/>
+          </a:lnRef>
+          <a:fillRef idx="3">
+            <a:schemeClr val="accent1"/>
+          </a:fillRef>
+          <a:effectRef idx="2">
+            <a:schemeClr val="accent1"/>
+          </a:effectRef>
+          <a:fontRef idx="minor">
+            <a:schemeClr val="lt1"/>
+          </a:fontRef>
+        </p:style>
+        <p:txBody>
+          <a:bodyPr rtlCol="0" anchor="ctr"/>
+          <a:lstStyle/>
+          <a:p>
+            <a:pPr algn="ctr"/>
+          </a:p>
+        </p:txBody>
+      </p:sp>
+      <p:sp>
+        <p:nvSpPr>
+          <p:cNvPr id="11" name="TextBox 10"/>
+          <p:cNvSpPr txBox="1"/>
+          <p:nvPr/>
+        </p:nvSpPr>
+        <p:spPr>
+          <a:xfrm>
+            <a:off x="7909560" y="1737360"/>
+            <a:ext cx="3566160" cy="457200"/>
+          </a:xfrm>
+          <a:prstGeom prst="rect">
+            <a:avLst/>
+          </a:prstGeom>
+          <a:noFill/>
+        </p:spPr>
+        <p:txBody>
+          <a:bodyPr wrap="square" anchor="t" lIns="38100" rIns="38100" tIns="25400" bIns="25400">
+            <a:spAutoFit/>
+          </a:bodyPr>
+          <a:lstStyle/>
+          <a:p>
+            <a:pPr algn="l">
+              <a:lnSpc>
+                <a:spcPct val="106000"/>
+              </a:lnSpc>
+              <a:spcBef>
+                <a:spcPts val="0"/>
+              </a:spcBef>
+              <a:spcAft>
+                <a:spcPts val="200"/>
+              </a:spcAft>
+            </a:pPr>
+            <a:r>
+              <a:rPr sz="1300" b="1" i="0">
+                <a:solidFill>
+                  <a:srgbClr val="A8323B"/>
                 </a:solidFill>
                 <a:latin typeface="Bricolage Grotesque"/>
               </a:rPr>
-              <a:t>Evaluatie.</a:t>
-            </a:r>
-          </a:p>
+              <a:t>Puedo… · Ik kan…</a:t>
+            </a:r>
+          </a:p>
+        </p:txBody>
+      </p:sp>
+      <p:sp>
+        <p:nvSpPr>
+          <p:cNvPr id="12" name="TextBox 11"/>
+          <p:cNvSpPr txBox="1"/>
+          <p:nvPr/>
+        </p:nvSpPr>
+        <p:spPr>
+          <a:xfrm>
+            <a:off x="7909560" y="2331720"/>
+            <a:ext cx="3566160" cy="457200"/>
+          </a:xfrm>
+          <a:prstGeom prst="rect">
+            <a:avLst/>
+          </a:prstGeom>
+          <a:noFill/>
+        </p:spPr>
+        <p:txBody>
+          <a:bodyPr wrap="square" anchor="t" lIns="38100" rIns="38100" tIns="25400" bIns="25400">
+            <a:spAutoFit/>
+          </a:bodyPr>
+          <a:lstStyle/>
           <a:p>
             <a:pPr algn="l">
               <a:lnSpc>
@@ -9145,15 +9875,47 @@
               </a:spcAft>
             </a:pPr>
             <a:r>
-              <a:rPr sz="1250" b="0" i="0">
-                <a:solidFill>
-                  <a:srgbClr val="ECEAE3"/>
-                </a:solidFill>
-                <a:latin typeface="Inter"/>
-              </a:rPr>
-              <a:t>Mondelinge mini-taak («un día de saludos»: 3 momenten groeten + estar) + herkennen van saludos/estados. Geen leerplan → focus op «kunnen gebruiken in de praktijk».</a:t>
-            </a:r>
-          </a:p>
+              <a:rPr sz="1200" b="0" i="0">
+                <a:solidFill>
+                  <a:srgbClr val="20242E"/>
+                </a:solidFill>
+                <a:latin typeface="Inter"/>
+              </a:rPr>
+              <a:t>🟢🟡🔴  </a:t>
+            </a:r>
+            <a:r>
+              <a:rPr sz="1200" b="0" i="0">
+                <a:solidFill>
+                  <a:srgbClr val="20242E"/>
+                </a:solidFill>
+                <a:latin typeface="Inter"/>
+              </a:rPr>
+              <a:t>groeten volgens het moment</a:t>
+            </a:r>
+          </a:p>
+        </p:txBody>
+      </p:sp>
+      <p:sp>
+        <p:nvSpPr>
+          <p:cNvPr id="13" name="TextBox 12"/>
+          <p:cNvSpPr txBox="1"/>
+          <p:nvPr/>
+        </p:nvSpPr>
+        <p:spPr>
+          <a:xfrm>
+            <a:off x="7909560" y="2898648"/>
+            <a:ext cx="3566160" cy="457200"/>
+          </a:xfrm>
+          <a:prstGeom prst="rect">
+            <a:avLst/>
+          </a:prstGeom>
+          <a:noFill/>
+        </p:spPr>
+        <p:txBody>
+          <a:bodyPr wrap="square" anchor="t" lIns="38100" rIns="38100" tIns="25400" bIns="25400">
+            <a:spAutoFit/>
+          </a:bodyPr>
+          <a:lstStyle/>
           <a:p>
             <a:pPr algn="l">
               <a:lnSpc>
@@ -9167,15 +9929,47 @@
               </a:spcAft>
             </a:pPr>
             <a:r>
-              <a:rPr sz="600" b="0" i="0">
+              <a:rPr sz="1200" b="0" i="0">
                 <a:solidFill>
                   <a:srgbClr val="20242E"/>
                 </a:solidFill>
                 <a:latin typeface="Inter"/>
               </a:rPr>
-              <a:t/>
-            </a:r>
-          </a:p>
+              <a:t>🟢🟡🔴  </a:t>
+            </a:r>
+            <a:r>
+              <a:rPr sz="1200" b="0" i="0">
+                <a:solidFill>
+                  <a:srgbClr val="20242E"/>
+                </a:solidFill>
+                <a:latin typeface="Inter"/>
+              </a:rPr>
+              <a:t>hoe het gaat zeggen (estar)</a:t>
+            </a:r>
+          </a:p>
+        </p:txBody>
+      </p:sp>
+      <p:sp>
+        <p:nvSpPr>
+          <p:cNvPr id="14" name="TextBox 13"/>
+          <p:cNvSpPr txBox="1"/>
+          <p:nvPr/>
+        </p:nvSpPr>
+        <p:spPr>
+          <a:xfrm>
+            <a:off x="7909560" y="3465576"/>
+            <a:ext cx="3566160" cy="457200"/>
+          </a:xfrm>
+          <a:prstGeom prst="rect">
+            <a:avLst/>
+          </a:prstGeom>
+          <a:noFill/>
+        </p:spPr>
+        <p:txBody>
+          <a:bodyPr wrap="square" anchor="t" lIns="38100" rIns="38100" tIns="25400" bIns="25400">
+            <a:spAutoFit/>
+          </a:bodyPr>
+          <a:lstStyle/>
           <a:p>
             <a:pPr algn="l">
               <a:lnSpc>
@@ -9189,20 +9983,150 @@
               </a:spcAft>
             </a:pPr>
             <a:r>
-              <a:rPr sz="1150" b="0" i="1">
-                <a:solidFill>
-                  <a:srgbClr val="A6A29A"/>
-                </a:solidFill>
-                <a:latin typeface="Inter"/>
-              </a:rPr>
-              <a:t>Oplossingen staan bij elke oefendia in de presenter-notities; antwoorden verschijnen bij klik.</a:t>
-            </a:r>
-          </a:p>
-        </p:txBody>
-      </p:sp>
-      <p:sp>
-        <p:nvSpPr>
-          <p:cNvPr id="5" name="Rectangle 4"/>
+              <a:rPr sz="1200" b="0" i="0">
+                <a:solidFill>
+                  <a:srgbClr val="20242E"/>
+                </a:solidFill>
+                <a:latin typeface="Inter"/>
+              </a:rPr>
+              <a:t>🟢🟡🔴  </a:t>
+            </a:r>
+            <a:r>
+              <a:rPr sz="1200" b="0" i="0">
+                <a:solidFill>
+                  <a:srgbClr val="20242E"/>
+                </a:solidFill>
+                <a:latin typeface="Inter"/>
+              </a:rPr>
+              <a:t>afscheid nemen</a:t>
+            </a:r>
+          </a:p>
+        </p:txBody>
+      </p:sp>
+      <p:sp>
+        <p:nvSpPr>
+          <p:cNvPr id="15" name="TextBox 14"/>
+          <p:cNvSpPr txBox="1"/>
+          <p:nvPr/>
+        </p:nvSpPr>
+        <p:spPr>
+          <a:xfrm>
+            <a:off x="7909560" y="4032504"/>
+            <a:ext cx="3566160" cy="457200"/>
+          </a:xfrm>
+          <a:prstGeom prst="rect">
+            <a:avLst/>
+          </a:prstGeom>
+          <a:noFill/>
+        </p:spPr>
+        <p:txBody>
+          <a:bodyPr wrap="square" anchor="t" lIns="38100" rIns="38100" tIns="25400" bIns="25400">
+            <a:spAutoFit/>
+          </a:bodyPr>
+          <a:lstStyle/>
+          <a:p>
+            <a:pPr algn="l">
+              <a:lnSpc>
+                <a:spcPct val="106000"/>
+              </a:lnSpc>
+              <a:spcBef>
+                <a:spcPts val="0"/>
+              </a:spcBef>
+              <a:spcAft>
+                <a:spcPts val="200"/>
+              </a:spcAft>
+            </a:pPr>
+            <a:r>
+              <a:rPr sz="1200" b="0" i="0">
+                <a:solidFill>
+                  <a:srgbClr val="20242E"/>
+                </a:solidFill>
+                <a:latin typeface="Inter"/>
+              </a:rPr>
+              <a:t>🟢🟡🔴  </a:t>
+            </a:r>
+            <a:r>
+              <a:rPr sz="1200" b="0" i="0">
+                <a:solidFill>
+                  <a:srgbClr val="20242E"/>
+                </a:solidFill>
+                <a:latin typeface="Inter"/>
+              </a:rPr>
+              <a:t>-o/-a &amp; tú/usted kiezen</a:t>
+            </a:r>
+          </a:p>
+        </p:txBody>
+      </p:sp>
+      <p:sp>
+        <p:nvSpPr>
+          <p:cNvPr id="16" name="TextBox 15"/>
+          <p:cNvSpPr txBox="1"/>
+          <p:nvPr/>
+        </p:nvSpPr>
+        <p:spPr>
+          <a:xfrm>
+            <a:off x="7909560" y="4892040"/>
+            <a:ext cx="3566160" cy="640080"/>
+          </a:xfrm>
+          <a:prstGeom prst="rect">
+            <a:avLst/>
+          </a:prstGeom>
+          <a:noFill/>
+        </p:spPr>
+        <p:txBody>
+          <a:bodyPr wrap="square" anchor="t" lIns="38100" rIns="38100" tIns="25400" bIns="25400">
+            <a:spAutoFit/>
+          </a:bodyPr>
+          <a:lstStyle/>
+          <a:p>
+            <a:pPr algn="l">
+              <a:lnSpc>
+                <a:spcPct val="106000"/>
+              </a:lnSpc>
+              <a:spcBef>
+                <a:spcPts val="0"/>
+              </a:spcBef>
+              <a:spcAft>
+                <a:spcPts val="200"/>
+              </a:spcAft>
+            </a:pPr>
+            <a:r>
+              <a:rPr sz="1200" b="1" i="0">
+                <a:solidFill>
+                  <a:srgbClr val="A8323B"/>
+                </a:solidFill>
+                <a:latin typeface="Bricolage Grotesque"/>
+              </a:rPr>
+              <a:t>🎮 Repasa jugando</a:t>
+            </a:r>
+          </a:p>
+          <a:p>
+            <a:pPr algn="l">
+              <a:lnSpc>
+                <a:spcPct val="106000"/>
+              </a:lnSpc>
+              <a:spcBef>
+                <a:spcPts val="0"/>
+              </a:spcBef>
+              <a:spcAft>
+                <a:spcPts val="200"/>
+              </a:spcAft>
+            </a:pPr>
+            <a:r>
+              <a:rPr sz="1100" b="0" i="1">
+                <a:solidFill>
+                  <a:srgbClr val="6A6E78"/>
+                </a:solidFill>
+                <a:latin typeface="Inter"/>
+              </a:rPr>
+              <a:t>online op de hub</a:t>
+            </a:r>
+          </a:p>
+        </p:txBody>
+      </p:sp>
+      <p:sp>
+        <p:nvSpPr>
+          <p:cNvPr id="17" name="Rectangle 16"/>
           <p:cNvSpPr/>
           <p:nvPr/>
         </p:nvSpPr>
@@ -9246,7 +10170,7 @@
       </p:sp>
       <p:sp>
         <p:nvSpPr>
-          <p:cNvPr id="6" name="TextBox 5"/>
+          <p:cNvPr id="18" name="TextBox 17"/>
           <p:cNvSpPr txBox="1"/>
           <p:nvPr/>
         </p:nvSpPr>
@@ -9300,7 +10224,7 @@
       </p:sp>
       <p:sp>
         <p:nvSpPr>
-          <p:cNvPr id="7" name="TextBox 6"/>
+          <p:cNvPr id="19" name="TextBox 18"/>
           <p:cNvSpPr txBox="1"/>
           <p:nvPr/>
         </p:nvSpPr>
@@ -9345,7 +10269,7 @@
       </p:sp>
       <p:sp>
         <p:nvSpPr>
-          <p:cNvPr id="8" name="TextBox 7"/>
+          <p:cNvPr id="20" name="TextBox 19"/>
           <p:cNvSpPr txBox="1"/>
           <p:nvPr/>
         </p:nvSpPr>
@@ -9384,6 +10308,544 @@
                 <a:latin typeface="Inter"/>
               </a:rPr>
               <a:t>14</a:t>
+            </a:r>
+          </a:p>
+        </p:txBody>
+      </p:sp>
+    </p:spTree>
+  </p:cSld>
+  <p:clrMapOvr>
+    <a:masterClrMapping/>
+  </p:clrMapOvr>
+</p:sld>
+</file>
+
+<file path=ppt/slides/slide15.xml><?xml version="1.0" encoding="utf-8"?>
+<p:sld xmlns:a="http://schemas.openxmlformats.org/drawingml/2006/main" xmlns:p="http://schemas.openxmlformats.org/presentationml/2006/main" xmlns:r="http://schemas.openxmlformats.org/officeDocument/2006/relationships">
+  <p:cSld>
+    <p:spTree>
+      <p:nvGrpSpPr>
+        <p:cNvPr id="1" name=""/>
+        <p:cNvGrpSpPr/>
+        <p:nvPr/>
+      </p:nvGrpSpPr>
+      <p:grpSpPr/>
+      <p:sp>
+        <p:nvSpPr>
+          <p:cNvPr id="2" name="Rectangle 1"/>
+          <p:cNvSpPr/>
+          <p:nvPr/>
+        </p:nvSpPr>
+        <p:spPr>
+          <a:xfrm>
+            <a:off x="0" y="0"/>
+            <a:ext cx="12191695" cy="6858000"/>
+          </a:xfrm>
+          <a:prstGeom prst="rect">
+            <a:avLst/>
+          </a:prstGeom>
+          <a:solidFill>
+            <a:srgbClr val="241C1B"/>
+          </a:solidFill>
+          <a:ln>
+            <a:noFill/>
+          </a:ln>
+          <a:effectLst/>
+        </p:spPr>
+        <p:style>
+          <a:lnRef idx="1">
+            <a:schemeClr val="accent1"/>
+          </a:lnRef>
+          <a:fillRef idx="3">
+            <a:schemeClr val="accent1"/>
+          </a:fillRef>
+          <a:effectRef idx="2">
+            <a:schemeClr val="accent1"/>
+          </a:effectRef>
+          <a:fontRef idx="minor">
+            <a:schemeClr val="lt1"/>
+          </a:fontRef>
+        </p:style>
+        <p:txBody>
+          <a:bodyPr rtlCol="0" anchor="ctr"/>
+          <a:lstStyle/>
+          <a:p>
+            <a:pPr algn="ctr"/>
+          </a:p>
+        </p:txBody>
+      </p:sp>
+      <p:sp>
+        <p:nvSpPr>
+          <p:cNvPr id="3" name="TextBox 2"/>
+          <p:cNvSpPr txBox="1"/>
+          <p:nvPr/>
+        </p:nvSpPr>
+        <p:spPr>
+          <a:xfrm>
+            <a:off x="548640" y="457200"/>
+            <a:ext cx="10972800" cy="640080"/>
+          </a:xfrm>
+          <a:prstGeom prst="rect">
+            <a:avLst/>
+          </a:prstGeom>
+          <a:noFill/>
+        </p:spPr>
+        <p:txBody>
+          <a:bodyPr wrap="square" anchor="t" lIns="38100" rIns="38100" tIns="25400" bIns="25400">
+            <a:spAutoFit/>
+          </a:bodyPr>
+          <a:lstStyle/>
+          <a:p>
+            <a:pPr algn="l">
+              <a:lnSpc>
+                <a:spcPct val="106000"/>
+              </a:lnSpc>
+              <a:spcBef>
+                <a:spcPts val="0"/>
+              </a:spcBef>
+              <a:spcAft>
+                <a:spcPts val="200"/>
+              </a:spcAft>
+            </a:pPr>
+            <a:r>
+              <a:rPr sz="2200" b="1" i="0">
+                <a:solidFill>
+                  <a:srgbClr val="FFFFFF"/>
+                </a:solidFill>
+                <a:latin typeface="Bricolage Grotesque"/>
+              </a:rPr>
+              <a:t>Docentendossier · Unidad 2 «Saludos»</a:t>
+            </a:r>
+          </a:p>
+        </p:txBody>
+      </p:sp>
+      <p:sp>
+        <p:nvSpPr>
+          <p:cNvPr id="4" name="TextBox 3"/>
+          <p:cNvSpPr txBox="1"/>
+          <p:nvPr/>
+        </p:nvSpPr>
+        <p:spPr>
+          <a:xfrm>
+            <a:off x="548640" y="1280160"/>
+            <a:ext cx="11064240" cy="4937760"/>
+          </a:xfrm>
+          <a:prstGeom prst="rect">
+            <a:avLst/>
+          </a:prstGeom>
+          <a:noFill/>
+        </p:spPr>
+        <p:txBody>
+          <a:bodyPr wrap="square" anchor="t" lIns="38100" rIns="38100" tIns="25400" bIns="25400">
+            <a:spAutoFit/>
+          </a:bodyPr>
+          <a:lstStyle/>
+          <a:p>
+            <a:pPr algn="l">
+              <a:lnSpc>
+                <a:spcPct val="106000"/>
+              </a:lnSpc>
+              <a:spcBef>
+                <a:spcPts val="0"/>
+              </a:spcBef>
+              <a:spcAft>
+                <a:spcPts val="200"/>
+              </a:spcAft>
+            </a:pPr>
+            <a:r>
+              <a:rPr sz="1400" b="1" i="0">
+                <a:solidFill>
+                  <a:srgbClr val="FBEAEC"/>
+                </a:solidFill>
+                <a:latin typeface="Bricolage Grotesque"/>
+              </a:rPr>
+              <a:t>Timing (2 lesuren van 50 min).</a:t>
+            </a:r>
+          </a:p>
+          <a:p>
+            <a:pPr algn="l">
+              <a:lnSpc>
+                <a:spcPct val="106000"/>
+              </a:lnSpc>
+              <a:spcBef>
+                <a:spcPts val="0"/>
+              </a:spcBef>
+              <a:spcAft>
+                <a:spcPts val="200"/>
+              </a:spcAft>
+            </a:pPr>
+            <a:r>
+              <a:rPr sz="1250" b="0" i="0">
+                <a:solidFill>
+                  <a:srgbClr val="ECEAE3"/>
+                </a:solidFill>
+                <a:latin typeface="Inter"/>
+              </a:rPr>
+              <a:t>Les 1: Escucha (sitcom ep. 2, 3 momenten) + Suena bien (jota/h muda) + Kit (saludos por el día · estar+estado). Les 2: gramática functioneel (estar · saludo por hora), hablar, tarea + música.</a:t>
+            </a:r>
+          </a:p>
+          <a:p>
+            <a:pPr algn="l">
+              <a:lnSpc>
+                <a:spcPct val="106000"/>
+              </a:lnSpc>
+              <a:spcBef>
+                <a:spcPts val="0"/>
+              </a:spcBef>
+              <a:spcAft>
+                <a:spcPts val="200"/>
+              </a:spcAft>
+            </a:pPr>
+            <a:r>
+              <a:rPr sz="600" b="0" i="0">
+                <a:solidFill>
+                  <a:srgbClr val="20242E"/>
+                </a:solidFill>
+                <a:latin typeface="Inter"/>
+              </a:rPr>
+              <a:t/>
+            </a:r>
+          </a:p>
+          <a:p>
+            <a:pPr algn="l">
+              <a:lnSpc>
+                <a:spcPct val="106000"/>
+              </a:lnSpc>
+              <a:spcBef>
+                <a:spcPts val="0"/>
+              </a:spcBef>
+              <a:spcAft>
+                <a:spcPts val="200"/>
+              </a:spcAft>
+            </a:pPr>
+            <a:r>
+              <a:rPr sz="1400" b="1" i="0">
+                <a:solidFill>
+                  <a:srgbClr val="FBEAEC"/>
+                </a:solidFill>
+                <a:latin typeface="Bricolage Grotesque"/>
+              </a:rPr>
+              <a:t>Aanpak C4 (survival).</a:t>
+            </a:r>
+          </a:p>
+          <a:p>
+            <a:pPr algn="l">
+              <a:lnSpc>
+                <a:spcPct val="106000"/>
+              </a:lnSpc>
+              <a:spcBef>
+                <a:spcPts val="0"/>
+              </a:spcBef>
+              <a:spcAft>
+                <a:spcPts val="200"/>
+              </a:spcAft>
+            </a:pPr>
+            <a:r>
+              <a:rPr sz="1250" b="0" i="0">
+                <a:solidFill>
+                  <a:srgbClr val="ECEAE3"/>
+                </a:solidFill>
+                <a:latin typeface="Inter"/>
+              </a:rPr>
+              <a:t>Chunks komen auditief binnen (luisteren → naspreken). estar enkel functioneel (estoy/estás/está voor toestand), géén ser/estar-contrast als systeem en géén volledige conjugatie — dat is C5/C6. Doelcodes: C4-GE-1/2 · C4-WS-2 · C4-MEC-3 · C4-CU-2.</a:t>
+            </a:r>
+          </a:p>
+          <a:p>
+            <a:pPr algn="l">
+              <a:lnSpc>
+                <a:spcPct val="106000"/>
+              </a:lnSpc>
+              <a:spcBef>
+                <a:spcPts val="0"/>
+              </a:spcBef>
+              <a:spcAft>
+                <a:spcPts val="200"/>
+              </a:spcAft>
+            </a:pPr>
+            <a:r>
+              <a:rPr sz="600" b="0" i="0">
+                <a:solidFill>
+                  <a:srgbClr val="20242E"/>
+                </a:solidFill>
+                <a:latin typeface="Inter"/>
+              </a:rPr>
+              <a:t/>
+            </a:r>
+          </a:p>
+          <a:p>
+            <a:pPr algn="l">
+              <a:lnSpc>
+                <a:spcPct val="106000"/>
+              </a:lnSpc>
+              <a:spcBef>
+                <a:spcPts val="0"/>
+              </a:spcBef>
+              <a:spcAft>
+                <a:spcPts val="200"/>
+              </a:spcAft>
+            </a:pPr>
+            <a:r>
+              <a:rPr sz="1400" b="1" i="0">
+                <a:solidFill>
+                  <a:srgbClr val="FBEAEC"/>
+                </a:solidFill>
+                <a:latin typeface="Bricolage Grotesque"/>
+              </a:rPr>
+              <a:t>Evaluatie.</a:t>
+            </a:r>
+          </a:p>
+          <a:p>
+            <a:pPr algn="l">
+              <a:lnSpc>
+                <a:spcPct val="106000"/>
+              </a:lnSpc>
+              <a:spcBef>
+                <a:spcPts val="0"/>
+              </a:spcBef>
+              <a:spcAft>
+                <a:spcPts val="200"/>
+              </a:spcAft>
+            </a:pPr>
+            <a:r>
+              <a:rPr sz="1250" b="0" i="0">
+                <a:solidFill>
+                  <a:srgbClr val="ECEAE3"/>
+                </a:solidFill>
+                <a:latin typeface="Inter"/>
+              </a:rPr>
+              <a:t>Mondelinge mini-taak («un día de saludos»: 3 momenten groeten + estar) + herkennen van saludos/estados. Geen leerplan → focus op «kunnen gebruiken in de praktijk».</a:t>
+            </a:r>
+          </a:p>
+          <a:p>
+            <a:pPr algn="l">
+              <a:lnSpc>
+                <a:spcPct val="106000"/>
+              </a:lnSpc>
+              <a:spcBef>
+                <a:spcPts val="0"/>
+              </a:spcBef>
+              <a:spcAft>
+                <a:spcPts val="200"/>
+              </a:spcAft>
+            </a:pPr>
+            <a:r>
+              <a:rPr sz="600" b="0" i="0">
+                <a:solidFill>
+                  <a:srgbClr val="20242E"/>
+                </a:solidFill>
+                <a:latin typeface="Inter"/>
+              </a:rPr>
+              <a:t/>
+            </a:r>
+          </a:p>
+          <a:p>
+            <a:pPr algn="l">
+              <a:lnSpc>
+                <a:spcPct val="106000"/>
+              </a:lnSpc>
+              <a:spcBef>
+                <a:spcPts val="0"/>
+              </a:spcBef>
+              <a:spcAft>
+                <a:spcPts val="200"/>
+              </a:spcAft>
+            </a:pPr>
+            <a:r>
+              <a:rPr sz="1150" b="0" i="1">
+                <a:solidFill>
+                  <a:srgbClr val="A6A29A"/>
+                </a:solidFill>
+                <a:latin typeface="Inter"/>
+              </a:rPr>
+              <a:t>Oplossingen staan bij elke oefendia in de presenter-notities; antwoorden verschijnen bij klik.</a:t>
+            </a:r>
+          </a:p>
+        </p:txBody>
+      </p:sp>
+      <p:sp>
+        <p:nvSpPr>
+          <p:cNvPr id="5" name="Rectangle 4"/>
+          <p:cNvSpPr/>
+          <p:nvPr/>
+        </p:nvSpPr>
+        <p:spPr>
+          <a:xfrm>
+            <a:off x="0" y="6547104"/>
+            <a:ext cx="12191695" cy="310896"/>
+          </a:xfrm>
+          <a:prstGeom prst="rect">
+            <a:avLst/>
+          </a:prstGeom>
+          <a:solidFill>
+            <a:srgbClr val="F3EEE4"/>
+          </a:solidFill>
+          <a:ln>
+            <a:noFill/>
+          </a:ln>
+          <a:effectLst/>
+        </p:spPr>
+        <p:style>
+          <a:lnRef idx="1">
+            <a:schemeClr val="accent1"/>
+          </a:lnRef>
+          <a:fillRef idx="3">
+            <a:schemeClr val="accent1"/>
+          </a:fillRef>
+          <a:effectRef idx="2">
+            <a:schemeClr val="accent1"/>
+          </a:effectRef>
+          <a:fontRef idx="minor">
+            <a:schemeClr val="lt1"/>
+          </a:fontRef>
+        </p:style>
+        <p:txBody>
+          <a:bodyPr rtlCol="0" anchor="ctr"/>
+          <a:lstStyle/>
+          <a:p>
+            <a:pPr algn="ctr"/>
+          </a:p>
+        </p:txBody>
+      </p:sp>
+      <p:sp>
+        <p:nvSpPr>
+          <p:cNvPr id="6" name="TextBox 5"/>
+          <p:cNvSpPr txBox="1"/>
+          <p:nvPr/>
+        </p:nvSpPr>
+        <p:spPr>
+          <a:xfrm>
+            <a:off x="411480" y="6565392"/>
+            <a:ext cx="5486400" cy="274320"/>
+          </a:xfrm>
+          <a:prstGeom prst="rect">
+            <a:avLst/>
+          </a:prstGeom>
+          <a:noFill/>
+        </p:spPr>
+        <p:txBody>
+          <a:bodyPr wrap="square" anchor="ctr" lIns="38100" rIns="38100" tIns="25400" bIns="25400">
+            <a:spAutoFit/>
+          </a:bodyPr>
+          <a:lstStyle/>
+          <a:p>
+            <a:pPr algn="l">
+              <a:lnSpc>
+                <a:spcPct val="106000"/>
+              </a:lnSpc>
+              <a:spcBef>
+                <a:spcPts val="0"/>
+              </a:spcBef>
+              <a:spcAft>
+                <a:spcPts val="200"/>
+              </a:spcAft>
+            </a:pPr>
+            <a:r>
+              <a:rPr sz="1100" b="1" i="0">
+                <a:solidFill>
+                  <a:srgbClr val="D64550"/>
+                </a:solidFill>
+                <a:latin typeface="Inter"/>
+              </a:rPr>
+              <a:t>● </a:t>
+            </a:r>
+            <a:r>
+              <a:rPr sz="950" b="0" i="0">
+                <a:solidFill>
+                  <a:srgbClr val="6A6E78"/>
+                </a:solidFill>
+                <a:latin typeface="Inter"/>
+              </a:rPr>
+              <a:t>U2 · SALUDOS   ·   C4 · La Ruta</a:t>
+            </a:r>
+          </a:p>
+        </p:txBody>
+      </p:sp>
+      <p:sp>
+        <p:nvSpPr>
+          <p:cNvPr id="7" name="TextBox 6"/>
+          <p:cNvSpPr txBox="1"/>
+          <p:nvPr/>
+        </p:nvSpPr>
+        <p:spPr>
+          <a:xfrm>
+            <a:off x="8686800" y="6565392"/>
+            <a:ext cx="3063240" cy="274320"/>
+          </a:xfrm>
+          <a:prstGeom prst="rect">
+            <a:avLst/>
+          </a:prstGeom>
+          <a:noFill/>
+        </p:spPr>
+        <p:txBody>
+          <a:bodyPr wrap="square" anchor="ctr" lIns="38100" rIns="38100" tIns="25400" bIns="25400">
+            <a:spAutoFit/>
+          </a:bodyPr>
+          <a:lstStyle/>
+          <a:p>
+            <a:pPr algn="r">
+              <a:lnSpc>
+                <a:spcPct val="106000"/>
+              </a:lnSpc>
+              <a:spcBef>
+                <a:spcPts val="0"/>
+              </a:spcBef>
+              <a:spcAft>
+                <a:spcPts val="200"/>
+              </a:spcAft>
+            </a:pPr>
+            <a:r>
+              <a:rPr sz="900" b="0" i="1">
+                <a:solidFill>
+                  <a:srgbClr val="6A6E78"/>
+                </a:solidFill>
+                <a:latin typeface="Inter"/>
+              </a:rPr>
+              <a:t>Docentenversie — met oplossingen</a:t>
+            </a:r>
+          </a:p>
+        </p:txBody>
+      </p:sp>
+      <p:sp>
+        <p:nvSpPr>
+          <p:cNvPr id="8" name="TextBox 7"/>
+          <p:cNvSpPr txBox="1"/>
+          <p:nvPr/>
+        </p:nvSpPr>
+        <p:spPr>
+          <a:xfrm>
+            <a:off x="11475720" y="6565392"/>
+            <a:ext cx="457200" cy="274320"/>
+          </a:xfrm>
+          <a:prstGeom prst="rect">
+            <a:avLst/>
+          </a:prstGeom>
+          <a:noFill/>
+        </p:spPr>
+        <p:txBody>
+          <a:bodyPr wrap="square" anchor="ctr" lIns="38100" rIns="38100" tIns="25400" bIns="25400">
+            <a:spAutoFit/>
+          </a:bodyPr>
+          <a:lstStyle/>
+          <a:p>
+            <a:pPr algn="r">
+              <a:lnSpc>
+                <a:spcPct val="106000"/>
+              </a:lnSpc>
+              <a:spcBef>
+                <a:spcPts val="0"/>
+              </a:spcBef>
+              <a:spcAft>
+                <a:spcPts val="200"/>
+              </a:spcAft>
+            </a:pPr>
+            <a:r>
+              <a:rPr sz="950" b="1" i="0">
+                <a:solidFill>
+                  <a:srgbClr val="A8323B"/>
+                </a:solidFill>
+                <a:latin typeface="Inter"/>
+              </a:rPr>
+              <a:t>15</a:t>
             </a:r>
           </a:p>
         </p:txBody>

--- a/03-build/pptx/C4_U2_docente.pptx
+++ b/03-build/pptx/C4_U2_docente.pptx
@@ -4651,7 +4651,6 @@
               <a:srgbClr val="D64550"/>
             </a:solidFill>
           </a:ln>
-          <a:effectLst/>
           <a:effectLst>
             <a:outerShdw blurRad="90000" dist="38000" dir="5400000" rotWithShape="0">
               <a:srgbClr val="20242E">
@@ -4839,7 +4838,6 @@
               <a:srgbClr val="E4E3DE"/>
             </a:solidFill>
           </a:ln>
-          <a:effectLst/>
           <a:effectLst>
             <a:outerShdw blurRad="90000" dist="38000" dir="5400000" rotWithShape="0">
               <a:srgbClr val="20242E">
@@ -5564,7 +5562,6 @@
               <a:srgbClr val="E4E3DE"/>
             </a:solidFill>
           </a:ln>
-          <a:effectLst/>
           <a:effectLst>
             <a:outerShdw blurRad="90000" dist="38000" dir="5400000" rotWithShape="0">
               <a:srgbClr val="20242E">
@@ -5708,7 +5705,6 @@
               <a:srgbClr val="E4E3DE"/>
             </a:solidFill>
           </a:ln>
-          <a:effectLst/>
           <a:effectLst>
             <a:outerShdw blurRad="90000" dist="38000" dir="5400000" rotWithShape="0">
               <a:srgbClr val="20242E">
@@ -5852,7 +5848,6 @@
               <a:srgbClr val="E4E3DE"/>
             </a:solidFill>
           </a:ln>
-          <a:effectLst/>
           <a:effectLst>
             <a:outerShdw blurRad="90000" dist="38000" dir="5400000" rotWithShape="0">
               <a:srgbClr val="20242E">
@@ -5996,7 +5991,6 @@
               <a:srgbClr val="E4E3DE"/>
             </a:solidFill>
           </a:ln>
-          <a:effectLst/>
           <a:effectLst>
             <a:outerShdw blurRad="90000" dist="38000" dir="5400000" rotWithShape="0">
               <a:srgbClr val="20242E">
@@ -6140,7 +6134,6 @@
               <a:srgbClr val="E4E3DE"/>
             </a:solidFill>
           </a:ln>
-          <a:effectLst/>
           <a:effectLst>
             <a:outerShdw blurRad="90000" dist="38000" dir="5400000" rotWithShape="0">
               <a:srgbClr val="20242E">
@@ -6284,7 +6277,6 @@
               <a:srgbClr val="E4E3DE"/>
             </a:solidFill>
           </a:ln>
-          <a:effectLst/>
           <a:effectLst>
             <a:outerShdw blurRad="90000" dist="38000" dir="5400000" rotWithShape="0">
               <a:srgbClr val="20242E">
@@ -6428,7 +6420,6 @@
               <a:srgbClr val="D64550"/>
             </a:solidFill>
           </a:ln>
-          <a:effectLst/>
           <a:effectLst>
             <a:outerShdw blurRad="90000" dist="38000" dir="5400000" rotWithShape="0">
               <a:srgbClr val="20242E">
@@ -7065,7 +7056,6 @@
               <a:srgbClr val="D64550"/>
             </a:solidFill>
           </a:ln>
-          <a:effectLst/>
           <a:effectLst>
             <a:outerShdw blurRad="90000" dist="38000" dir="5400000" rotWithShape="0">
               <a:srgbClr val="20242E">
@@ -7325,7 +7315,6 @@
               <a:srgbClr val="D64550"/>
             </a:solidFill>
           </a:ln>
-          <a:effectLst/>
           <a:effectLst>
             <a:outerShdw blurRad="90000" dist="38000" dir="5400000" rotWithShape="0">
               <a:srgbClr val="20242E">
@@ -8104,7 +8093,6 @@
               <a:srgbClr val="D64550"/>
             </a:solidFill>
           </a:ln>
-          <a:effectLst/>
           <a:effectLst>
             <a:outerShdw blurRad="90000" dist="38000" dir="5400000" rotWithShape="0">
               <a:srgbClr val="20242E">
@@ -8258,7 +8246,6 @@
               <a:srgbClr val="E4E3DE"/>
             </a:solidFill>
           </a:ln>
-          <a:effectLst/>
           <a:effectLst>
             <a:outerShdw blurRad="90000" dist="38000" dir="5400000" rotWithShape="0">
               <a:srgbClr val="20242E">
@@ -8412,7 +8399,6 @@
               <a:srgbClr val="E4E3DE"/>
             </a:solidFill>
           </a:ln>
-          <a:effectLst/>
           <a:effectLst>
             <a:outerShdw blurRad="90000" dist="38000" dir="5400000" rotWithShape="0">
               <a:srgbClr val="20242E">
@@ -8566,7 +8552,6 @@
               <a:srgbClr val="D64550"/>
             </a:solidFill>
           </a:ln>
-          <a:effectLst/>
           <a:effectLst>
             <a:outerShdw blurRad="90000" dist="38000" dir="5400000" rotWithShape="0">
               <a:srgbClr val="20242E">
@@ -8720,7 +8705,6 @@
               <a:srgbClr val="D64550"/>
             </a:solidFill>
           </a:ln>
-          <a:effectLst/>
           <a:effectLst>
             <a:outerShdw blurRad="90000" dist="38000" dir="5400000" rotWithShape="0">
               <a:srgbClr val="20242E">
@@ -8874,7 +8858,6 @@
               <a:srgbClr val="D64550"/>
             </a:solidFill>
           </a:ln>
-          <a:effectLst/>
           <a:effectLst>
             <a:outerShdw blurRad="90000" dist="38000" dir="5400000" rotWithShape="0">
               <a:srgbClr val="20242E">
@@ -9511,7 +9494,6 @@
               <a:srgbClr val="E4E3DE"/>
             </a:solidFill>
           </a:ln>
-          <a:effectLst/>
           <a:effectLst>
             <a:outerShdw blurRad="90000" dist="38000" dir="5400000" rotWithShape="0">
               <a:srgbClr val="20242E">
@@ -9765,7 +9747,6 @@
               <a:srgbClr val="D64550"/>
             </a:solidFill>
           </a:ln>
-          <a:effectLst/>
           <a:effectLst>
             <a:outerShdw blurRad="90000" dist="38000" dir="5400000" rotWithShape="0">
               <a:srgbClr val="20242E">
@@ -11171,7 +11152,6 @@
               <a:srgbClr val="E4E3DE"/>
             </a:solidFill>
           </a:ln>
-          <a:effectLst/>
           <a:effectLst>
             <a:outerShdw blurRad="90000" dist="38000" dir="5400000" rotWithShape="0">
               <a:srgbClr val="20242E">
@@ -11340,7 +11320,6 @@
               <a:srgbClr val="E4E3DE"/>
             </a:solidFill>
           </a:ln>
-          <a:effectLst/>
           <a:effectLst>
             <a:outerShdw blurRad="90000" dist="38000" dir="5400000" rotWithShape="0">
               <a:srgbClr val="20242E">
@@ -11509,7 +11488,6 @@
               <a:srgbClr val="E4E3DE"/>
             </a:solidFill>
           </a:ln>
-          <a:effectLst/>
           <a:effectLst>
             <a:outerShdw blurRad="90000" dist="38000" dir="5400000" rotWithShape="0">
               <a:srgbClr val="20242E">
@@ -11678,7 +11656,6 @@
               <a:srgbClr val="E4E3DE"/>
             </a:solidFill>
           </a:ln>
-          <a:effectLst/>
           <a:effectLst>
             <a:outerShdw blurRad="90000" dist="38000" dir="5400000" rotWithShape="0">
               <a:srgbClr val="20242E">
@@ -11847,7 +11824,6 @@
               <a:srgbClr val="E4E3DE"/>
             </a:solidFill>
           </a:ln>
-          <a:effectLst/>
           <a:effectLst>
             <a:outerShdw blurRad="90000" dist="38000" dir="5400000" rotWithShape="0">
               <a:srgbClr val="20242E">
@@ -12016,7 +11992,6 @@
               <a:srgbClr val="E4E3DE"/>
             </a:solidFill>
           </a:ln>
-          <a:effectLst/>
           <a:effectLst>
             <a:outerShdw blurRad="90000" dist="38000" dir="5400000" rotWithShape="0">
               <a:srgbClr val="20242E">
@@ -12185,7 +12160,6 @@
               <a:srgbClr val="E4E3DE"/>
             </a:solidFill>
           </a:ln>
-          <a:effectLst/>
           <a:effectLst>
             <a:outerShdw blurRad="90000" dist="38000" dir="5400000" rotWithShape="0">
               <a:srgbClr val="20242E">
@@ -12354,7 +12328,6 @@
               <a:srgbClr val="E4E3DE"/>
             </a:solidFill>
           </a:ln>
-          <a:effectLst/>
           <a:effectLst>
             <a:outerShdw blurRad="90000" dist="38000" dir="5400000" rotWithShape="0">
               <a:srgbClr val="20242E">
@@ -12523,7 +12496,6 @@
               <a:srgbClr val="E4E3DE"/>
             </a:solidFill>
           </a:ln>
-          <a:effectLst/>
           <a:effectLst>
             <a:outerShdw blurRad="90000" dist="38000" dir="5400000" rotWithShape="0">
               <a:srgbClr val="20242E">
@@ -13272,7 +13244,6 @@
               <a:srgbClr val="E4E3DE"/>
             </a:solidFill>
           </a:ln>
-          <a:effectLst/>
           <a:effectLst>
             <a:outerShdw blurRad="90000" dist="38000" dir="5400000" rotWithShape="0">
               <a:srgbClr val="20242E">
@@ -14127,7 +14098,6 @@
               <a:srgbClr val="D64550"/>
             </a:solidFill>
           </a:ln>
-          <a:effectLst/>
           <a:effectLst>
             <a:outerShdw blurRad="90000" dist="38000" dir="5400000" rotWithShape="0">
               <a:srgbClr val="20242E">
@@ -14876,7 +14846,6 @@
               <a:srgbClr val="E4E3DE"/>
             </a:solidFill>
           </a:ln>
-          <a:effectLst/>
           <a:effectLst>
             <a:outerShdw blurRad="90000" dist="38000" dir="5400000" rotWithShape="0">
               <a:srgbClr val="20242E">
@@ -15087,7 +15056,6 @@
               <a:srgbClr val="E4E3DE"/>
             </a:solidFill>
           </a:ln>
-          <a:effectLst/>
           <a:effectLst>
             <a:outerShdw blurRad="90000" dist="38000" dir="5400000" rotWithShape="0">
               <a:srgbClr val="20242E">
@@ -15298,7 +15266,6 @@
               <a:srgbClr val="D64550"/>
             </a:solidFill>
           </a:ln>
-          <a:effectLst/>
           <a:effectLst>
             <a:outerShdw blurRad="90000" dist="38000" dir="5400000" rotWithShape="0">
               <a:srgbClr val="20242E">
@@ -16124,7 +16091,6 @@
               <a:srgbClr val="E4E3DE"/>
             </a:solidFill>
           </a:ln>
-          <a:effectLst/>
           <a:effectLst>
             <a:outerShdw blurRad="90000" dist="38000" dir="5400000" rotWithShape="0">
               <a:srgbClr val="20242E">
@@ -16494,7 +16460,6 @@
               <a:srgbClr val="E4E3DE"/>
             </a:solidFill>
           </a:ln>
-          <a:effectLst/>
           <a:effectLst>
             <a:outerShdw blurRad="90000" dist="38000" dir="5400000" rotWithShape="0">
               <a:srgbClr val="20242E">
@@ -16810,7 +16775,6 @@
               <a:srgbClr val="E4E3DE"/>
             </a:solidFill>
           </a:ln>
-          <a:effectLst/>
           <a:effectLst>
             <a:outerShdw blurRad="90000" dist="38000" dir="5400000" rotWithShape="0">
               <a:srgbClr val="20242E">
@@ -17708,7 +17672,6 @@
               <a:srgbClr val="D64550"/>
             </a:solidFill>
           </a:ln>
-          <a:effectLst/>
           <a:effectLst>
             <a:outerShdw blurRad="90000" dist="38000" dir="5400000" rotWithShape="0">
               <a:srgbClr val="20242E">
@@ -18078,7 +18041,6 @@
               <a:srgbClr val="E4E3DE"/>
             </a:solidFill>
           </a:ln>
-          <a:effectLst/>
           <a:effectLst>
             <a:outerShdw blurRad="90000" dist="38000" dir="5400000" rotWithShape="0">
               <a:srgbClr val="20242E">
@@ -19476,7 +19438,6 @@
               <a:srgbClr val="E4E3DE"/>
             </a:solidFill>
           </a:ln>
-          <a:effectLst/>
           <a:effectLst>
             <a:outerShdw blurRad="90000" dist="38000" dir="5400000" rotWithShape="0">
               <a:srgbClr val="20242E">
@@ -19765,7 +19726,6 @@
               <a:srgbClr val="E4E3DE"/>
             </a:solidFill>
           </a:ln>
-          <a:effectLst/>
           <a:effectLst>
             <a:outerShdw blurRad="90000" dist="38000" dir="5400000" rotWithShape="0">
               <a:srgbClr val="20242E">
@@ -20054,7 +20014,6 @@
               <a:srgbClr val="D64550"/>
             </a:solidFill>
           </a:ln>
-          <a:effectLst/>
           <a:effectLst>
             <a:outerShdw blurRad="90000" dist="38000" dir="5400000" rotWithShape="0">
               <a:srgbClr val="20242E">
@@ -21167,7 +21126,6 @@
               <a:srgbClr val="E4E3DE"/>
             </a:solidFill>
           </a:ln>
-          <a:effectLst/>
           <a:effectLst>
             <a:outerShdw blurRad="90000" dist="38000" dir="5400000" rotWithShape="0">
               <a:srgbClr val="20242E">
@@ -21311,7 +21269,6 @@
               <a:srgbClr val="E4E3DE"/>
             </a:solidFill>
           </a:ln>
-          <a:effectLst/>
           <a:effectLst>
             <a:outerShdw blurRad="90000" dist="38000" dir="5400000" rotWithShape="0">
               <a:srgbClr val="20242E">
@@ -21455,7 +21412,6 @@
               <a:srgbClr val="E4E3DE"/>
             </a:solidFill>
           </a:ln>
-          <a:effectLst/>
           <a:effectLst>
             <a:outerShdw blurRad="90000" dist="38000" dir="5400000" rotWithShape="0">
               <a:srgbClr val="20242E">
@@ -22163,7 +22119,6 @@
               <a:srgbClr val="E4E3DE"/>
             </a:solidFill>
           </a:ln>
-          <a:effectLst/>
           <a:effectLst>
             <a:outerShdw blurRad="90000" dist="38000" dir="5400000" rotWithShape="0">
               <a:srgbClr val="20242E">
